--- a/Topic_D/Exam_Practice/TD-L08_Speaking_Workshop_Personal_Qualities_and_Professional_Skills.pptx
+++ b/Topic_D/Exam_Practice/TD-L08_Speaking_Workshop_Personal_Qualities_and_Professional_Skills.pptx
@@ -615,7 +615,11 @@
           <a:lstStyle/>
           <a:p>
             <a:r>
-              <a:rPr lang="en-US" dirty="0"/>
+              <a:rPr lang="ar-SA" dirty="0">
+                <a:latin typeface="Amiri" pitchFamily="2" charset="-78"/>
+                <a:ea typeface="Amiri" pitchFamily="2" charset="-78"/>
+                <a:cs typeface="Amiri" pitchFamily="2" charset="-78"/>
+              </a:rPr>
               <a:t>ROLE PLAY C (Develop) — a team-project review.
 SET-UP IN THE BREAKOUT ROOM: A = examiner (reads the left column ONLY — the questions, in order), B = candidate (sees the task column; Core may use the help column), C = observer (ticks the feedback checklist). 1 minute preparation, about 3 minutes speaking, 1 minute feedback, then rotate.
 Task ! is the unexpected question: in the exam the candidate has not seen it — the examiner should read it without warning.
@@ -707,7 +711,11 @@
           <a:lstStyle/>
           <a:p>
             <a:r>
-              <a:rPr lang="en-US" dirty="0"/>
+              <a:rPr lang="ar-SA" dirty="0">
+                <a:latin typeface="Amiri" pitchFamily="2" charset="-78"/>
+                <a:ea typeface="Amiri" pitchFamily="2" charset="-78"/>
+                <a:cs typeface="Amiri" pitchFamily="2" charset="-78"/>
+              </a:rPr>
               <a:t>ROLE PLAY D (Stretch) — a leadership interview.
 SET-UP IN THE BREAKOUT ROOM: A = examiner (reads the left column ONLY — the questions, in order), B = candidate (sees the task column; Core may use the help column), C = observer (ticks the feedback checklist). 1 minute preparation, about 3 minutes speaking, 1 minute feedback, then rotate.
 Task ! is the unexpected question: in the exam the candidate has not seen it — the examiner should read it without warning.
@@ -1243,7 +1251,11 @@
           <a:lstStyle/>
           <a:p>
             <a:r>
-              <a:rPr lang="en-US" dirty="0"/>
+              <a:rPr lang="ar-SA" dirty="0">
+                <a:latin typeface="Amiri" pitchFamily="2" charset="-78"/>
+                <a:ea typeface="Amiri" pitchFamily="2" charset="-78"/>
+                <a:cs typeface="Amiri" pitchFamily="2" charset="-78"/>
+              </a:rPr>
               <a:t>TOPIC CONVERSATION — Core. Examiner asks the questions in order and may add “لِمَاذَا؟ / هَلْ يُمْكِنُ أَنْ تَشْرَحَ أَكْثَرَ؟” to push for more. Candidate aims for one full sentence per question.
 </a:t>
             </a:r>
@@ -1332,7 +1344,11 @@
           <a:lstStyle/>
           <a:p>
             <a:r>
-              <a:rPr lang="en-US" dirty="0"/>
+              <a:rPr lang="ar-SA" dirty="0">
+                <a:latin typeface="Amiri" pitchFamily="2" charset="-78"/>
+                <a:ea typeface="Amiri" pitchFamily="2" charset="-78"/>
+                <a:cs typeface="Amiri" pitchFamily="2" charset="-78"/>
+              </a:rPr>
               <a:t>TOPIC CONVERSATION — Develop. Examiner asks the questions in order and may add “لِمَاذَا؟ / هَلْ يُمْكِنُ أَنْ تَشْرَحَ أَكْثَرَ؟” to push for more. Candidate aims for two or three sentences, with a relative clause and evidence.
 </a:t>
             </a:r>
@@ -1421,7 +1437,11 @@
           <a:lstStyle/>
           <a:p>
             <a:r>
-              <a:rPr lang="en-US" dirty="0"/>
+              <a:rPr lang="ar-SA" dirty="0">
+                <a:latin typeface="Amiri" pitchFamily="2" charset="-78"/>
+                <a:ea typeface="Amiri" pitchFamily="2" charset="-78"/>
+                <a:cs typeface="Amiri" pitchFamily="2" charset="-78"/>
+              </a:rPr>
               <a:t>TOPIC CONVERSATION — Stretch. Examiner asks the questions in order and may add “لِمَاذَا؟ / هَلْ يُمْكِنُ أَنْ تَشْرَحَ أَكْثَرَ؟” to push for more. Candidate aims for a developed answer: opinion, balance, concession and a conditional.
 </a:t>
             </a:r>
@@ -1510,7 +1530,11 @@
           <a:lstStyle/>
           <a:p>
             <a:r>
-              <a:rPr lang="en-US" dirty="0"/>
+              <a:rPr lang="ar-SA" dirty="0">
+                <a:latin typeface="Amiri" pitchFamily="2" charset="-78"/>
+                <a:ea typeface="Amiri" pitchFamily="2" charset="-78"/>
+                <a:cs typeface="Amiri" pitchFamily="2" charset="-78"/>
+              </a:rPr>
               <a:t>WELCOME (1 min) — while students join.
 • Greet each student by name as they arrive: السَّلَامُ عَلَيْكُمْ. Take the register (Pastoral Tracker: attendance 0/1).
 • 2-MINUTE CHECK-IN (SEND training): a private chat to any student who seemed unsettled last lesson — “Are you okay today? 👍 / 👎”.
@@ -2224,7 +2248,11 @@
           <a:lstStyle/>
           <a:p>
             <a:r>
-              <a:rPr lang="en-US" dirty="0"/>
+              <a:rPr lang="ar-SA" dirty="0">
+                <a:latin typeface="Amiri" pitchFamily="2" charset="-78"/>
+                <a:ea typeface="Amiri" pitchFamily="2" charset="-78"/>
+                <a:cs typeface="Amiri" pitchFamily="2" charset="-78"/>
+              </a:rPr>
               <a:t>TEACH (3 min). Role play = precise and complete; conversation = develop. Choral repetition of the repair phrases. To a girl: تُعِيدِي.</a:t>
             </a:r>
             <a:endParaRPr lang="en-US" dirty="0"/>
@@ -2312,7 +2340,11 @@
           <a:lstStyle/>
           <a:p>
             <a:r>
-              <a:rPr lang="en-US" dirty="0"/>
+              <a:rPr lang="ar-SA" dirty="0">
+                <a:latin typeface="Amiri" pitchFamily="2" charset="-78"/>
+                <a:ea typeface="Amiri" pitchFamily="2" charset="-78"/>
+                <a:cs typeface="Amiri" pitchFamily="2" charset="-78"/>
+              </a:rPr>
               <a:t>LANGUAGE BANK (2 min) — adjectives agree: أَنَا مُنَظَّمٌ / أَنَا مُنَظَّمَةٌ · أُخْتِي مُبْدِعَةٌ · زُمَلَائِي مُتَعَاوِنُونَ. Noun for the quality: الصَّبْرُ · الدِّقَّةُ · الإِبْدَاعُ. Note: صَبُورٌ is often the same for m. and f.</a:t>
             </a:r>
             <a:endParaRPr lang="en-US" dirty="0"/>
@@ -2400,7 +2432,11 @@
           <a:lstStyle/>
           <a:p>
             <a:r>
-              <a:rPr lang="en-US" dirty="0"/>
+              <a:rPr lang="ar-SA" dirty="0">
+                <a:latin typeface="Amiri" pitchFamily="2" charset="-78"/>
+                <a:ea typeface="Amiri" pitchFamily="2" charset="-78"/>
+                <a:cs typeface="Amiri" pitchFamily="2" charset="-78"/>
+              </a:rPr>
               <a:t>LANGUAGE BANK (2 min) — المُمَرِّضُ يَحْتَاجُ إِلَى الصَّبْرِ · الوَظِيفَةُ الَّتِي تُنَاسِبُنِي … · الأَشْخَاصُ الَّذِينَ يُحِبُّونَ … Evidence: أَنَا مُنَظَّمٌ، فَمَثَلًا أَكْتُبُ جَدْوَلًا لِكُلِّ أُسْبُوعٍ.</a:t>
             </a:r>
             <a:endParaRPr lang="en-US" dirty="0"/>
@@ -2576,7 +2612,11 @@
           <a:lstStyle/>
           <a:p>
             <a:r>
-              <a:rPr lang="en-US" dirty="0"/>
+              <a:rPr lang="ar-SA" dirty="0">
+                <a:latin typeface="Amiri" pitchFamily="2" charset="-78"/>
+                <a:ea typeface="Amiri" pitchFamily="2" charset="-78"/>
+                <a:cs typeface="Amiri" pitchFamily="2" charset="-78"/>
+              </a:rPr>
               <a:t>ROLE PLAY A (Core) — a school prefect application.
 SET-UP IN THE BREAKOUT ROOM: A = examiner (reads the left column ONLY — the questions, in order), B = candidate (sees the task column; Core may use the help column), C = observer (ticks the feedback checklist). 1 minute preparation, about 3 minutes speaking, 1 minute feedback, then rotate.
 Task ! is the unexpected question: in the exam the candidate has not seen it — the examiner should read it without warning.
@@ -2668,7 +2708,11 @@
           <a:lstStyle/>
           <a:p>
             <a:r>
-              <a:rPr lang="en-US" dirty="0"/>
+              <a:rPr lang="ar-SA" dirty="0">
+                <a:latin typeface="Amiri" pitchFamily="2" charset="-78"/>
+                <a:ea typeface="Amiri" pitchFamily="2" charset="-78"/>
+                <a:cs typeface="Amiri" pitchFamily="2" charset="-78"/>
+              </a:rPr>
               <a:t>ROLE PLAY B (Core+) — a careers quiz.
 SET-UP IN THE BREAKOUT ROOM: A = examiner (reads the left column ONLY — the questions, in order), B = candidate (sees the task column; Core may use the help column), C = observer (ticks the feedback checklist). 1 minute preparation, about 3 minutes speaking, 1 minute feedback, then rotate.
 Task ! is the unexpected question: in the exam the candidate has not seen it — the examiner should read it without warning.
@@ -3156,6 +3200,7 @@
                   <a:srgbClr val="D4AF37"/>
                 </a:solidFill>
                 <a:latin typeface="Amiri" pitchFamily="2" charset="-78"/>
+                <a:ea typeface="Amiri" pitchFamily="2" charset="-78"/>
                 <a:cs typeface="Amiri" pitchFamily="2" charset="-78"/>
               </a:rPr>
               <a:t>م</a:t>
@@ -3362,6 +3407,7 @@
                   <a:srgbClr val="D4AF37"/>
                 </a:solidFill>
                 <a:latin typeface="Amiri" pitchFamily="2" charset="-78"/>
+                <a:ea typeface="Amiri" pitchFamily="2" charset="-78"/>
                 <a:cs typeface="Amiri" pitchFamily="2" charset="-78"/>
               </a:rPr>
               <a:t>وَرْشَةُ التَّحَدُّثِ — الصِّفَاتُ وَالمَهَارَاتُ</a:t>
@@ -3413,6 +3459,7 @@
                   <a:srgbClr val="C6D2E6"/>
                 </a:solidFill>
                 <a:latin typeface="Amiri" pitchFamily="2" charset="-78"/>
+                <a:ea typeface="Amiri" pitchFamily="2" charset="-78"/>
                 <a:cs typeface="Amiri" pitchFamily="2" charset="-78"/>
               </a:rPr>
               <a:t>المُعَلِّمُ الَّذِي يَحْتَاجُ إِلَى الصَّبْرِ</a:t>
@@ -3439,6 +3486,7 @@
                   <a:srgbClr val="C6D2E6"/>
                 </a:solidFill>
                 <a:latin typeface="Amiri" pitchFamily="2" charset="-78"/>
+                <a:ea typeface="Amiri" pitchFamily="2" charset="-78"/>
                 <a:cs typeface="Amiri" pitchFamily="2" charset="-78"/>
               </a:rPr>
               <a:t>لِأَنِّي</a:t>
@@ -3465,6 +3513,7 @@
                   <a:srgbClr val="C6D2E6"/>
                 </a:solidFill>
                 <a:latin typeface="Amiri" pitchFamily="2" charset="-78"/>
+                <a:ea typeface="Amiri" pitchFamily="2" charset="-78"/>
                 <a:cs typeface="Amiri" pitchFamily="2" charset="-78"/>
               </a:rPr>
               <a:t>فَمَثَلًا</a:t>
@@ -3897,6 +3946,7 @@
                   <a:srgbClr val="D4AF37"/>
                 </a:solidFill>
                 <a:latin typeface="Amiri" pitchFamily="2" charset="-78"/>
+                <a:ea typeface="Amiri" pitchFamily="2" charset="-78"/>
                 <a:cs typeface="Amiri" pitchFamily="2" charset="-78"/>
               </a:rPr>
               <a:t>م</a:t>
@@ -4217,6 +4267,7 @@
                   <a:srgbClr val="8A6D1E"/>
                 </a:solidFill>
                 <a:latin typeface="Amiri" pitchFamily="2" charset="-78"/>
+                <a:ea typeface="Amiri" pitchFamily="2" charset="-78"/>
                 <a:cs typeface="Amiri" pitchFamily="2" charset="-78"/>
               </a:rPr>
               <a:t>تَوْزِيعُ الأَدْوَارِ</a:t>
@@ -4497,6 +4548,7 @@
                   <a:srgbClr val="1B3B6F"/>
                 </a:solidFill>
                 <a:latin typeface="Amiri" pitchFamily="2" charset="-78"/>
+                <a:ea typeface="Amiri" pitchFamily="2" charset="-78"/>
                 <a:cs typeface="Amiri" pitchFamily="2" charset="-78"/>
               </a:rPr>
               <a:t>اخْتَرْنَا … لِأَنَّهَا … وَ… لِأَنَّهُ …</a:t>
@@ -4573,6 +4625,7 @@
                   <a:srgbClr val="1B3B6F"/>
                 </a:solidFill>
                 <a:latin typeface="Amiri" pitchFamily="2" charset="-78"/>
+                <a:ea typeface="Amiri" pitchFamily="2" charset="-78"/>
                 <a:cs typeface="Amiri" pitchFamily="2" charset="-78"/>
               </a:rPr>
               <a:t>كَيْفَ وَزَّعْتُمُ الأَدْوَارَ فِي الفَرِيقِ؟</a:t>
@@ -4676,6 +4729,7 @@
                   <a:srgbClr val="1B3B6F"/>
                 </a:solidFill>
                 <a:latin typeface="Amiri" pitchFamily="2" charset="-78"/>
+                <a:ea typeface="Amiri" pitchFamily="2" charset="-78"/>
                 <a:cs typeface="Amiri" pitchFamily="2" charset="-78"/>
               </a:rPr>
               <a:t>لِأَنِّي … فَمَثَلًا …</a:t>
@@ -4752,6 +4806,7 @@
                   <a:srgbClr val="1B3B6F"/>
                 </a:solidFill>
                 <a:latin typeface="Amiri" pitchFamily="2" charset="-78"/>
+                <a:ea typeface="Amiri" pitchFamily="2" charset="-78"/>
                 <a:cs typeface="Amiri" pitchFamily="2" charset="-78"/>
               </a:rPr>
               <a:t>وَأَنْتَ، لِمَاذَا أَصْبَحْتَ القَائِدَ؟</a:t>
@@ -4855,6 +4910,7 @@
                   <a:srgbClr val="1B3B6F"/>
                 </a:solidFill>
                 <a:latin typeface="Amiri" pitchFamily="2" charset="-78"/>
+                <a:ea typeface="Amiri" pitchFamily="2" charset="-78"/>
                 <a:cs typeface="Amiri" pitchFamily="2" charset="-78"/>
               </a:rPr>
               <a:t>نَعَمْ، اخْتَلَفَ … فَاسْتَمَعْتُ …</a:t>
@@ -4931,6 +4987,7 @@
                   <a:srgbClr val="1B3B6F"/>
                 </a:solidFill>
                 <a:latin typeface="Amiri" pitchFamily="2" charset="-78"/>
+                <a:ea typeface="Amiri" pitchFamily="2" charset="-78"/>
                 <a:cs typeface="Amiri" pitchFamily="2" charset="-78"/>
               </a:rPr>
               <a:t>هَلْ وَاجَهْتُمْ مُشْكِلَةً؟</a:t>
@@ -5034,6 +5091,7 @@
                   <a:srgbClr val="1B3B6F"/>
                 </a:solidFill>
                 <a:latin typeface="Amiri" pitchFamily="2" charset="-78"/>
+                <a:ea typeface="Amiri" pitchFamily="2" charset="-78"/>
                 <a:cs typeface="Amiri" pitchFamily="2" charset="-78"/>
               </a:rPr>
               <a:t>الصِّفَةُ الَّتِي … لِذٰلِكَ سَأُحَدِّدُ …</a:t>
@@ -5110,6 +5168,7 @@
                   <a:srgbClr val="1B3B6F"/>
                 </a:solidFill>
                 <a:latin typeface="Amiri" pitchFamily="2" charset="-78"/>
+                <a:ea typeface="Amiri" pitchFamily="2" charset="-78"/>
                 <a:cs typeface="Amiri" pitchFamily="2" charset="-78"/>
               </a:rPr>
               <a:t>مَا الصِّفَةُ الَّتِي تُرِيدُ أَنْ تُطَوِّرَهَا؟</a:t>
@@ -5213,6 +5272,7 @@
                   <a:srgbClr val="1B3B6F"/>
                 </a:solidFill>
                 <a:latin typeface="Amiri" pitchFamily="2" charset="-78"/>
+                <a:ea typeface="Amiri" pitchFamily="2" charset="-78"/>
                 <a:cs typeface="Amiri" pitchFamily="2" charset="-78"/>
               </a:rPr>
               <a:t>لَوْ أَعَدْتُهُ، لَطَلَبْتُ …</a:t>
@@ -5289,6 +5349,7 @@
                   <a:srgbClr val="1B3B6F"/>
                 </a:solidFill>
                 <a:latin typeface="Amiri" pitchFamily="2" charset="-78"/>
+                <a:ea typeface="Amiri" pitchFamily="2" charset="-78"/>
                 <a:cs typeface="Amiri" pitchFamily="2" charset="-78"/>
               </a:rPr>
               <a:t>لَوْ أَعَدْتَ المَشْرُوعَ، مَاذَا تُغَيِّرُ؟</a:t>
@@ -5498,6 +5559,7 @@
                   <a:srgbClr val="D4AF37"/>
                 </a:solidFill>
                 <a:latin typeface="Amiri" pitchFamily="2" charset="-78"/>
+                <a:ea typeface="Amiri" pitchFamily="2" charset="-78"/>
                 <a:cs typeface="Amiri" pitchFamily="2" charset="-78"/>
               </a:rPr>
               <a:t>م</a:t>
@@ -5818,6 +5880,7 @@
                   <a:srgbClr val="8A6D1E"/>
                 </a:solidFill>
                 <a:latin typeface="Amiri" pitchFamily="2" charset="-78"/>
+                <a:ea typeface="Amiri" pitchFamily="2" charset="-78"/>
                 <a:cs typeface="Amiri" pitchFamily="2" charset="-78"/>
               </a:rPr>
               <a:t>هَلْ يُولَدُ القَائِدُ أَمْ يُصْنَعُ؟</a:t>
@@ -6098,6 +6161,7 @@
                   <a:srgbClr val="1B3B6F"/>
                 </a:solidFill>
                 <a:latin typeface="Amiri" pitchFamily="2" charset="-78"/>
+                <a:ea typeface="Amiri" pitchFamily="2" charset="-78"/>
                 <a:cs typeface="Amiri" pitchFamily="2" charset="-78"/>
               </a:rPr>
               <a:t>مِنْ نَاحِيَةٍ … وَمِنْ نَاحِيَةٍ أُخْرَى …</a:t>
@@ -6174,6 +6238,7 @@
                   <a:srgbClr val="1B3B6F"/>
                 </a:solidFill>
                 <a:latin typeface="Amiri" pitchFamily="2" charset="-78"/>
+                <a:ea typeface="Amiri" pitchFamily="2" charset="-78"/>
                 <a:cs typeface="Amiri" pitchFamily="2" charset="-78"/>
               </a:rPr>
               <a:t>هَلِ القِيَادَةُ مَوْهِبَةٌ أَمْ مَهَارَةٌ تُتَعَلَّمُ؟</a:t>
@@ -6277,6 +6342,7 @@
                   <a:srgbClr val="1B3B6F"/>
                 </a:solidFill>
                 <a:latin typeface="Amiri" pitchFamily="2" charset="-78"/>
+                <a:ea typeface="Amiri" pitchFamily="2" charset="-78"/>
                 <a:cs typeface="Amiri" pitchFamily="2" charset="-78"/>
               </a:rPr>
               <a:t>كُنْتُ … أَمَّا الآنَ فَأُقَدِّمُ …</a:t>
@@ -6353,6 +6419,7 @@
                   <a:srgbClr val="1B3B6F"/>
                 </a:solidFill>
                 <a:latin typeface="Amiri" pitchFamily="2" charset="-78"/>
+                <a:ea typeface="Amiri" pitchFamily="2" charset="-78"/>
                 <a:cs typeface="Amiri" pitchFamily="2" charset="-78"/>
               </a:rPr>
               <a:t>وَأَنْتَ؟</a:t>
@@ -6456,6 +6523,7 @@
                   <a:srgbClr val="1B3B6F"/>
                 </a:solidFill>
                 <a:latin typeface="Amiri" pitchFamily="2" charset="-78"/>
+                <a:ea typeface="Amiri" pitchFamily="2" charset="-78"/>
                 <a:cs typeface="Amiri" pitchFamily="2" charset="-78"/>
               </a:rPr>
               <a:t>المُعَلِّمَةُ الَّتِي … فَقَدْ …</a:t>
@@ -6532,6 +6600,7 @@
                   <a:srgbClr val="1B3B6F"/>
                 </a:solidFill>
                 <a:latin typeface="Amiri" pitchFamily="2" charset="-78"/>
+                <a:ea typeface="Amiri" pitchFamily="2" charset="-78"/>
                 <a:cs typeface="Amiri" pitchFamily="2" charset="-78"/>
               </a:rPr>
               <a:t>مَا الَّذِي غَيَّرَكَ؟</a:t>
@@ -6635,6 +6704,7 @@
                   <a:srgbClr val="1B3B6F"/>
                 </a:solidFill>
                 <a:latin typeface="Amiri" pitchFamily="2" charset="-78"/>
+                <a:ea typeface="Amiri" pitchFamily="2" charset="-78"/>
                 <a:cs typeface="Amiri" pitchFamily="2" charset="-78"/>
               </a:rPr>
               <a:t>صَحِيحٌ أَنَّ … غَيْرَ أَنَّ …</a:t>
@@ -6711,6 +6781,7 @@
                   <a:srgbClr val="1B3B6F"/>
                 </a:solidFill>
                 <a:latin typeface="Amiri" pitchFamily="2" charset="-78"/>
+                <a:ea typeface="Amiri" pitchFamily="2" charset="-78"/>
                 <a:cs typeface="Amiri" pitchFamily="2" charset="-78"/>
               </a:rPr>
               <a:t>أَلَيْسَتِ الصِّفَاتُ أَهَمَّ مِنَ الشَّهَادَاتِ؟</a:t>
@@ -6814,6 +6885,7 @@
                   <a:srgbClr val="1B3B6F"/>
                 </a:solidFill>
                 <a:latin typeface="Amiri" pitchFamily="2" charset="-78"/>
+                <a:ea typeface="Amiri" pitchFamily="2" charset="-78"/>
                 <a:cs typeface="Amiri" pitchFamily="2" charset="-78"/>
               </a:rPr>
               <a:t>لَوِ اسْتَطَعْتُ، لَاخْتَرْتُ …</a:t>
@@ -6890,6 +6962,7 @@
                   <a:srgbClr val="1B3B6F"/>
                 </a:solidFill>
                 <a:latin typeface="Amiri" pitchFamily="2" charset="-78"/>
+                <a:ea typeface="Amiri" pitchFamily="2" charset="-78"/>
                 <a:cs typeface="Amiri" pitchFamily="2" charset="-78"/>
               </a:rPr>
               <a:t>لَوِ اسْتَطَعْتَ أَنْ تَكْتَسِبَ صِفَةً وَاحِدَةً فَوْرًا، مَاذَا تَخْتَارُ؟</a:t>
@@ -7099,6 +7172,7 @@
                   <a:srgbClr val="D4AF37"/>
                 </a:solidFill>
                 <a:latin typeface="Amiri" pitchFamily="2" charset="-78"/>
+                <a:ea typeface="Amiri" pitchFamily="2" charset="-78"/>
                 <a:cs typeface="Amiri" pitchFamily="2" charset="-78"/>
               </a:rPr>
               <a:t>م</a:t>
@@ -7419,6 +7493,7 @@
                   <a:srgbClr val="8A6D1E"/>
                 </a:solidFill>
                 <a:latin typeface="Amiri" pitchFamily="2" charset="-78"/>
+                <a:ea typeface="Amiri" pitchFamily="2" charset="-78"/>
                 <a:cs typeface="Amiri" pitchFamily="2" charset="-78"/>
               </a:rPr>
               <a:t>وَرَقَةُ المُلَاحِظِ</a:t>
@@ -8889,6 +8964,7 @@
                   <a:srgbClr val="D4AF37"/>
                 </a:solidFill>
                 <a:latin typeface="Amiri" pitchFamily="2" charset="-78"/>
+                <a:ea typeface="Amiri" pitchFamily="2" charset="-78"/>
                 <a:cs typeface="Amiri" pitchFamily="2" charset="-78"/>
               </a:rPr>
               <a:t>م</a:t>
@@ -9209,6 +9285,7 @@
                   <a:srgbClr val="8A6D1E"/>
                 </a:solidFill>
                 <a:latin typeface="Amiri" pitchFamily="2" charset="-78"/>
+                <a:ea typeface="Amiri" pitchFamily="2" charset="-78"/>
                 <a:cs typeface="Amiri" pitchFamily="2" charset="-78"/>
               </a:rPr>
               <a:t>نَمُوذَجُ الإِجَابَةِ</a:t>
@@ -9451,6 +9528,7 @@
                   <a:srgbClr val="1B3B6F"/>
                 </a:solidFill>
                 <a:latin typeface="Amiri" pitchFamily="2" charset="-78"/>
+                <a:ea typeface="Amiri" pitchFamily="2" charset="-78"/>
                 <a:cs typeface="Amiri" pitchFamily="2" charset="-78"/>
               </a:rPr>
               <a:t>لِأَنِّي أُحِبُّ مُسَاعَدَةَ الطُّلَّابِ الصِّغَارِ.</a:t>
@@ -9527,6 +9605,7 @@
                   <a:srgbClr val="1B3B6F"/>
                 </a:solidFill>
                 <a:latin typeface="Amiri" pitchFamily="2" charset="-78"/>
+                <a:ea typeface="Amiri" pitchFamily="2" charset="-78"/>
                 <a:cs typeface="Amiri" pitchFamily="2" charset="-78"/>
               </a:rPr>
               <a:t>لِمَاذَا تُرِيدُ أَنْ تَكُونَ مُشْرِفًا؟</a:t>
@@ -9630,6 +9709,7 @@
                   <a:srgbClr val="1B3B6F"/>
                 </a:solidFill>
                 <a:latin typeface="Amiri" pitchFamily="2" charset="-78"/>
+                <a:ea typeface="Amiri" pitchFamily="2" charset="-78"/>
                 <a:cs typeface="Amiri" pitchFamily="2" charset="-78"/>
               </a:rPr>
               <a:t>أَنَا مَسْؤُولٌ وَمُنَظَّمٌ.</a:t>
@@ -9706,6 +9786,7 @@
                   <a:srgbClr val="1B3B6F"/>
                 </a:solidFill>
                 <a:latin typeface="Amiri" pitchFamily="2" charset="-78"/>
+                <a:ea typeface="Amiri" pitchFamily="2" charset="-78"/>
                 <a:cs typeface="Amiri" pitchFamily="2" charset="-78"/>
               </a:rPr>
               <a:t>صِفْ نَفْسَكَ بِكَلِمَتَيْنِ.</a:t>
@@ -9809,6 +9890,7 @@
                   <a:srgbClr val="1B3B6F"/>
                 </a:solidFill>
                 <a:latin typeface="Amiri" pitchFamily="2" charset="-78"/>
+                <a:ea typeface="Amiri" pitchFamily="2" charset="-78"/>
                 <a:cs typeface="Amiri" pitchFamily="2" charset="-78"/>
               </a:rPr>
               <a:t>أَحْيَانًا أَنَا خَجُولٌ قَلِيلًا.</a:t>
@@ -9885,6 +9967,7 @@
                   <a:srgbClr val="1B3B6F"/>
                 </a:solidFill>
                 <a:latin typeface="Amiri" pitchFamily="2" charset="-78"/>
+                <a:ea typeface="Amiri" pitchFamily="2" charset="-78"/>
                 <a:cs typeface="Amiri" pitchFamily="2" charset="-78"/>
               </a:rPr>
               <a:t>وَمَا نُقْطَةُ ضَعْفِكَ؟</a:t>
@@ -9988,6 +10071,7 @@
                   <a:srgbClr val="1B3B6F"/>
                 </a:solidFill>
                 <a:latin typeface="Amiri" pitchFamily="2" charset="-78"/>
+                <a:ea typeface="Amiri" pitchFamily="2" charset="-78"/>
                 <a:cs typeface="Amiri" pitchFamily="2" charset="-78"/>
               </a:rPr>
               <a:t>كَمْ يَوْمًا فِي الأُسْبُوعِ؟</a:t>
@@ -10064,6 +10148,7 @@
                   <a:srgbClr val="1B3B6F"/>
                 </a:solidFill>
                 <a:latin typeface="Amiri" pitchFamily="2" charset="-78"/>
+                <a:ea typeface="Amiri" pitchFamily="2" charset="-78"/>
                 <a:cs typeface="Amiri" pitchFamily="2" charset="-78"/>
               </a:rPr>
               <a:t>المُشْرِفُ يَعْمَلُ فِي الاسْتِرَاحَةِ.</a:t>
@@ -10167,6 +10252,7 @@
                   <a:srgbClr val="1B3B6F"/>
                 </a:solidFill>
                 <a:latin typeface="Amiri" pitchFamily="2" charset="-78"/>
+                <a:ea typeface="Amiri" pitchFamily="2" charset="-78"/>
                 <a:cs typeface="Amiri" pitchFamily="2" charset="-78"/>
               </a:rPr>
               <a:t>يَقُولُونَ إِنِّي لَطِيفٌ وَمُتَعَاوِنٌ.</a:t>
@@ -10243,6 +10329,7 @@
                   <a:srgbClr val="1B3B6F"/>
                 </a:solidFill>
                 <a:latin typeface="Amiri" pitchFamily="2" charset="-78"/>
+                <a:ea typeface="Amiri" pitchFamily="2" charset="-78"/>
                 <a:cs typeface="Amiri" pitchFamily="2" charset="-78"/>
               </a:rPr>
               <a:t>مَا رَأْيُ أَصْدِقَائِكَ فِيكَ؟</a:t>
@@ -10452,6 +10539,7 @@
                   <a:srgbClr val="D4AF37"/>
                 </a:solidFill>
                 <a:latin typeface="Amiri" pitchFamily="2" charset="-78"/>
+                <a:ea typeface="Amiri" pitchFamily="2" charset="-78"/>
                 <a:cs typeface="Amiri" pitchFamily="2" charset="-78"/>
               </a:rPr>
               <a:t>م</a:t>
@@ -10772,6 +10860,7 @@
                   <a:srgbClr val="8A6D1E"/>
                 </a:solidFill>
                 <a:latin typeface="Amiri" pitchFamily="2" charset="-78"/>
+                <a:ea typeface="Amiri" pitchFamily="2" charset="-78"/>
                 <a:cs typeface="Amiri" pitchFamily="2" charset="-78"/>
               </a:rPr>
               <a:t>نَمُوذَجُ الإِجَابَةِ</a:t>
@@ -11014,6 +11103,7 @@
                   <a:srgbClr val="1B3B6F"/>
                 </a:solidFill>
                 <a:latin typeface="Amiri" pitchFamily="2" charset="-78"/>
+                <a:ea typeface="Amiri" pitchFamily="2" charset="-78"/>
                 <a:cs typeface="Amiri" pitchFamily="2" charset="-78"/>
               </a:rPr>
               <a:t>أَنَا مُبْدِعٌ وَصَبُورٌ.</a:t>
@@ -11090,6 +11180,7 @@
                   <a:srgbClr val="1B3B6F"/>
                 </a:solidFill>
                 <a:latin typeface="Amiri" pitchFamily="2" charset="-78"/>
+                <a:ea typeface="Amiri" pitchFamily="2" charset="-78"/>
                 <a:cs typeface="Amiri" pitchFamily="2" charset="-78"/>
               </a:rPr>
               <a:t>مَا نِقَاطُ قُوَّتِكَ؟</a:t>
@@ -11193,6 +11284,7 @@
                   <a:srgbClr val="1B3B6F"/>
                 </a:solidFill>
                 <a:latin typeface="Amiri" pitchFamily="2" charset="-78"/>
+                <a:ea typeface="Amiri" pitchFamily="2" charset="-78"/>
                 <a:cs typeface="Amiri" pitchFamily="2" charset="-78"/>
               </a:rPr>
               <a:t>فَمَثَلًا أَرْسُمُ كُلَّ يَوْمٍ، وَأُعَلِّمُ أَخِي الصَّغِيرَ القِرَاءَةَ.</a:t>
@@ -11269,6 +11361,7 @@
                   <a:srgbClr val="1B3B6F"/>
                 </a:solidFill>
                 <a:latin typeface="Amiri" pitchFamily="2" charset="-78"/>
+                <a:ea typeface="Amiri" pitchFamily="2" charset="-78"/>
                 <a:cs typeface="Amiri" pitchFamily="2" charset="-78"/>
               </a:rPr>
               <a:t>أَعْطِنِي مِثَالًا.</a:t>
@@ -11372,6 +11465,7 @@
                   <a:srgbClr val="1B3B6F"/>
                 </a:solidFill>
                 <a:latin typeface="Amiri" pitchFamily="2" charset="-78"/>
+                <a:ea typeface="Amiri" pitchFamily="2" charset="-78"/>
                 <a:cs typeface="Amiri" pitchFamily="2" charset="-78"/>
               </a:rPr>
               <a:t>مَا الصِّفَاتُ الَّتِي يَحْتَاجُ إِلَيْهَا المُعَلِّمُ؟</a:t>
@@ -11448,6 +11542,7 @@
                   <a:srgbClr val="1B3B6F"/>
                 </a:solidFill>
                 <a:latin typeface="Amiri" pitchFamily="2" charset="-78"/>
+                <a:ea typeface="Amiri" pitchFamily="2" charset="-78"/>
                 <a:cs typeface="Amiri" pitchFamily="2" charset="-78"/>
               </a:rPr>
               <a:t>رُبَّمَا تُنَاسِبُكَ مِهْنَةُ المُعَلِّمِ.</a:t>
@@ -11551,6 +11646,7 @@
                   <a:srgbClr val="1B3B6F"/>
                 </a:solidFill>
                 <a:latin typeface="Amiri" pitchFamily="2" charset="-78"/>
+                <a:ea typeface="Amiri" pitchFamily="2" charset="-78"/>
                 <a:cs typeface="Amiri" pitchFamily="2" charset="-78"/>
               </a:rPr>
               <a:t>عِنْدِي الصَّبْرُ، لٰكِنِّي أَحْتَاجُ إِلَى ثِقَةٍ أَكْبَرَ عِنْدَمَا أَتَكَلَّمُ أَمَامَ النَّاسِ.</a:t>
@@ -11627,6 +11723,7 @@
                   <a:srgbClr val="1B3B6F"/>
                 </a:solidFill>
                 <a:latin typeface="Amiri" pitchFamily="2" charset="-78"/>
+                <a:ea typeface="Amiri" pitchFamily="2" charset="-78"/>
                 <a:cs typeface="Amiri" pitchFamily="2" charset="-78"/>
               </a:rPr>
               <a:t>الصَّبْرُ وَالتَّنْظِيمُ وَالثِّقَةُ.</a:t>
@@ -11730,6 +11827,7 @@
                   <a:srgbClr val="1B3B6F"/>
                 </a:solidFill>
                 <a:latin typeface="Amiri" pitchFamily="2" charset="-78"/>
+                <a:ea typeface="Amiri" pitchFamily="2" charset="-78"/>
                 <a:cs typeface="Amiri" pitchFamily="2" charset="-78"/>
               </a:rPr>
               <a:t>رُبَّمَا تُنَاسِبُنِي أَكْثَرَ، لِأَنَّ المُصَمِّمَ يَحْتَاجُ إِلَى الإِبْدَاعِ، وَهِيَ أَقْوَى صِفَةٍ عِنْدِي.</a:t>
@@ -11806,6 +11904,7 @@
                   <a:srgbClr val="1B3B6F"/>
                 </a:solidFill>
                 <a:latin typeface="Amiri" pitchFamily="2" charset="-78"/>
+                <a:ea typeface="Amiri" pitchFamily="2" charset="-78"/>
                 <a:cs typeface="Amiri" pitchFamily="2" charset="-78"/>
               </a:rPr>
               <a:t>وَمَاذَا عَنْ مِهْنَةِ المُصَمِّمِ؟</a:t>
@@ -12015,6 +12114,7 @@
                   <a:srgbClr val="D4AF37"/>
                 </a:solidFill>
                 <a:latin typeface="Amiri" pitchFamily="2" charset="-78"/>
+                <a:ea typeface="Amiri" pitchFamily="2" charset="-78"/>
                 <a:cs typeface="Amiri" pitchFamily="2" charset="-78"/>
               </a:rPr>
               <a:t>م</a:t>
@@ -12335,6 +12435,7 @@
                   <a:srgbClr val="8A6D1E"/>
                 </a:solidFill>
                 <a:latin typeface="Amiri" pitchFamily="2" charset="-78"/>
+                <a:ea typeface="Amiri" pitchFamily="2" charset="-78"/>
                 <a:cs typeface="Amiri" pitchFamily="2" charset="-78"/>
               </a:rPr>
               <a:t>نَمُوذَجُ الإِجَابَةِ</a:t>
@@ -12577,6 +12678,7 @@
                   <a:srgbClr val="1B3B6F"/>
                 </a:solidFill>
                 <a:latin typeface="Amiri" pitchFamily="2" charset="-78"/>
+                <a:ea typeface="Amiri" pitchFamily="2" charset="-78"/>
                 <a:cs typeface="Amiri" pitchFamily="2" charset="-78"/>
               </a:rPr>
               <a:t>اخْتَرْنَا سَارَةَ لِلتَّصْمِيمِ لِأَنَّهَا مُبْدِعَةٌ، وَعُمَرَ لِلْحِسَابَاتِ لِأَنَّهُ دَقِيقٌ جِدًّا.</a:t>
@@ -12653,6 +12755,7 @@
                   <a:srgbClr val="1B3B6F"/>
                 </a:solidFill>
                 <a:latin typeface="Amiri" pitchFamily="2" charset="-78"/>
+                <a:ea typeface="Amiri" pitchFamily="2" charset="-78"/>
                 <a:cs typeface="Amiri" pitchFamily="2" charset="-78"/>
               </a:rPr>
               <a:t>كَيْفَ وَزَّعْتُمُ الأَدْوَارَ فِي الفَرِيقِ؟</a:t>
@@ -12756,6 +12859,7 @@
                   <a:srgbClr val="1B3B6F"/>
                 </a:solidFill>
                 <a:latin typeface="Amiri" pitchFamily="2" charset="-78"/>
+                <a:ea typeface="Amiri" pitchFamily="2" charset="-78"/>
                 <a:cs typeface="Amiri" pitchFamily="2" charset="-78"/>
               </a:rPr>
               <a:t>لِأَنِّي مُنَظَّمٌ وَأُحِبُّ المَسْؤُولِيَّةَ؛ فَمَثَلًا صَنَعْتُ جَدْوَلًا لِلْمَهَامِّ، وَكُنْتُ أُذَكِّرُ الجَمِيعَ بِالمَوَاعِيدِ.</a:t>
@@ -12832,6 +12936,7 @@
                   <a:srgbClr val="1B3B6F"/>
                 </a:solidFill>
                 <a:latin typeface="Amiri" pitchFamily="2" charset="-78"/>
+                <a:ea typeface="Amiri" pitchFamily="2" charset="-78"/>
                 <a:cs typeface="Amiri" pitchFamily="2" charset="-78"/>
               </a:rPr>
               <a:t>وَأَنْتَ، لِمَاذَا أَصْبَحْتَ القَائِدَ؟</a:t>
@@ -12935,6 +13040,7 @@
                   <a:srgbClr val="1B3B6F"/>
                 </a:solidFill>
                 <a:latin typeface="Amiri" pitchFamily="2" charset="-78"/>
+                <a:ea typeface="Amiri" pitchFamily="2" charset="-78"/>
                 <a:cs typeface="Amiri" pitchFamily="2" charset="-78"/>
               </a:rPr>
               <a:t>نَعَمْ، اخْتَلَفَ عُضْوَانِ فِي الفَرِيقِ، فَاسْتَمَعْتُ إِلَيْهِمَا بِصَبْرٍ، ثُمَّ جَمَعْنَا الفِكْرَتَيْنِ مَعًا.</a:t>
@@ -13011,6 +13117,7 @@
                   <a:srgbClr val="1B3B6F"/>
                 </a:solidFill>
                 <a:latin typeface="Amiri" pitchFamily="2" charset="-78"/>
+                <a:ea typeface="Amiri" pitchFamily="2" charset="-78"/>
                 <a:cs typeface="Amiri" pitchFamily="2" charset="-78"/>
               </a:rPr>
               <a:t>هَلْ وَاجَهْتُمْ مُشْكِلَةً؟</a:t>
@@ -13114,6 +13221,7 @@
                   <a:srgbClr val="1B3B6F"/>
                 </a:solidFill>
                 <a:latin typeface="Amiri" pitchFamily="2" charset="-78"/>
+                <a:ea typeface="Amiri" pitchFamily="2" charset="-78"/>
                 <a:cs typeface="Amiri" pitchFamily="2" charset="-78"/>
               </a:rPr>
               <a:t>الصِّفَةُ الَّتِي أُرِيدُ أَنْ أُطَوِّرَهَا هِيَ الحَزْمُ، لِأَنِّي أَتْرُكُ النَّاسَ يَتَأَخَّرُونَ، لِذٰلِكَ سَأُحَدِّدُ مَوَاعِيدَ وَاضِحَةً.</a:t>
@@ -13190,6 +13298,7 @@
                   <a:srgbClr val="1B3B6F"/>
                 </a:solidFill>
                 <a:latin typeface="Amiri" pitchFamily="2" charset="-78"/>
+                <a:ea typeface="Amiri" pitchFamily="2" charset="-78"/>
                 <a:cs typeface="Amiri" pitchFamily="2" charset="-78"/>
               </a:rPr>
               <a:t>مَا الصِّفَةُ الَّتِي تُرِيدُ أَنْ تُطَوِّرَهَا؟</a:t>
@@ -13293,6 +13402,7 @@
                   <a:srgbClr val="1B3B6F"/>
                 </a:solidFill>
                 <a:latin typeface="Amiri" pitchFamily="2" charset="-78"/>
+                <a:ea typeface="Amiri" pitchFamily="2" charset="-78"/>
                 <a:cs typeface="Amiri" pitchFamily="2" charset="-78"/>
               </a:rPr>
               <a:t>لَوْ أَعَدْتُهُ، لَطَلَبْتُ مِنْ كُلِّ عُضْوٍ أَنْ يَخْتَارَ دَوْرَهُ بِنَفْسِهِ، لِأَنَّ النَّاسَ يَعْمَلُونَ أَفْضَلَ فِيمَا يُحِبُّونَ.</a:t>
@@ -13369,6 +13479,7 @@
                   <a:srgbClr val="1B3B6F"/>
                 </a:solidFill>
                 <a:latin typeface="Amiri" pitchFamily="2" charset="-78"/>
+                <a:ea typeface="Amiri" pitchFamily="2" charset="-78"/>
                 <a:cs typeface="Amiri" pitchFamily="2" charset="-78"/>
               </a:rPr>
               <a:t>لَوْ أَعَدْتَ المَشْرُوعَ، مَاذَا تُغَيِّرُ؟</a:t>
@@ -13578,6 +13689,7 @@
                   <a:srgbClr val="D4AF37"/>
                 </a:solidFill>
                 <a:latin typeface="Amiri" pitchFamily="2" charset="-78"/>
+                <a:ea typeface="Amiri" pitchFamily="2" charset="-78"/>
                 <a:cs typeface="Amiri" pitchFamily="2" charset="-78"/>
               </a:rPr>
               <a:t>م</a:t>
@@ -13898,6 +14010,7 @@
                   <a:srgbClr val="8A6D1E"/>
                 </a:solidFill>
                 <a:latin typeface="Amiri" pitchFamily="2" charset="-78"/>
+                <a:ea typeface="Amiri" pitchFamily="2" charset="-78"/>
                 <a:cs typeface="Amiri" pitchFamily="2" charset="-78"/>
               </a:rPr>
               <a:t>نَمُوذَجُ الإِجَابَةِ</a:t>
@@ -14140,6 +14253,7 @@
                   <a:srgbClr val="1B3B6F"/>
                 </a:solidFill>
                 <a:latin typeface="Amiri" pitchFamily="2" charset="-78"/>
+                <a:ea typeface="Amiri" pitchFamily="2" charset="-78"/>
                 <a:cs typeface="Amiri" pitchFamily="2" charset="-78"/>
               </a:rPr>
               <a:t>مِنْ نَاحِيَةٍ، يُولَدُ بَعْضُ النَّاسِ وَاثِقِينَ وَاجْتِمَاعِيِّينَ، وَمِنْ نَاحِيَةٍ أُخْرَى، يُمْكِنُ تَعَلُّمُ مَهَارَاتِ القِيَادَةِ بِالتَّدْرِيبِ وَالتَّجْرِبَةِ.</a:t>
@@ -14216,6 +14330,7 @@
                   <a:srgbClr val="1B3B6F"/>
                 </a:solidFill>
                 <a:latin typeface="Amiri" pitchFamily="2" charset="-78"/>
+                <a:ea typeface="Amiri" pitchFamily="2" charset="-78"/>
                 <a:cs typeface="Amiri" pitchFamily="2" charset="-78"/>
               </a:rPr>
               <a:t>هَلِ القِيَادَةُ مَوْهِبَةٌ أَمْ مَهَارَةٌ تُتَعَلَّمُ؟</a:t>
@@ -14319,6 +14434,7 @@
                   <a:srgbClr val="1B3B6F"/>
                 </a:solidFill>
                 <a:latin typeface="Amiri" pitchFamily="2" charset="-78"/>
+                <a:ea typeface="Amiri" pitchFamily="2" charset="-78"/>
                 <a:cs typeface="Amiri" pitchFamily="2" charset="-78"/>
               </a:rPr>
               <a:t>كُنْتُ خَجُولًا جِدًّا فِي الابْتِدَائِيَّةِ، أَمَّا الآنَ فَأُقَدِّمُ الاجْتِمَاعَاتِ الصَّبَاحِيَّةَ أَمَامَ خَمْسِمِئَةِ طَالِبٍ.</a:t>
@@ -14395,6 +14511,7 @@
                   <a:srgbClr val="1B3B6F"/>
                 </a:solidFill>
                 <a:latin typeface="Amiri" pitchFamily="2" charset="-78"/>
+                <a:ea typeface="Amiri" pitchFamily="2" charset="-78"/>
                 <a:cs typeface="Amiri" pitchFamily="2" charset="-78"/>
               </a:rPr>
               <a:t>وَأَنْتَ؟</a:t>
@@ -14498,6 +14615,7 @@
                   <a:srgbClr val="1B3B6F"/>
                 </a:solidFill>
                 <a:latin typeface="Amiri" pitchFamily="2" charset="-78"/>
+                <a:ea typeface="Amiri" pitchFamily="2" charset="-78"/>
                 <a:cs typeface="Amiri" pitchFamily="2" charset="-78"/>
               </a:rPr>
               <a:t>المُعَلِّمَةُ الَّتِي شَجَّعَتْنِي عَلَى الانْضِمَامِ إِلَى نَادِي المُنَاظَرَاتِ؛ فَقَدْ آمَنَتْ بِي قَبْلَ أَنْ أُؤْمِنَ بِنَفْسِي.</a:t>
@@ -14574,6 +14692,7 @@
                   <a:srgbClr val="1B3B6F"/>
                 </a:solidFill>
                 <a:latin typeface="Amiri" pitchFamily="2" charset="-78"/>
+                <a:ea typeface="Amiri" pitchFamily="2" charset="-78"/>
                 <a:cs typeface="Amiri" pitchFamily="2" charset="-78"/>
               </a:rPr>
               <a:t>مَا الَّذِي غَيَّرَكَ؟</a:t>
@@ -14677,6 +14796,7 @@
                   <a:srgbClr val="1B3B6F"/>
                 </a:solidFill>
                 <a:latin typeface="Amiri" pitchFamily="2" charset="-78"/>
+                <a:ea typeface="Amiri" pitchFamily="2" charset="-78"/>
                 <a:cs typeface="Amiri" pitchFamily="2" charset="-78"/>
               </a:rPr>
               <a:t>صَحِيحٌ أَنَّ الشَّهَادَةَ وَحْدَهَا لَا تَكْفِي، غَيْرَ أَنَّ الصِّفَاتِ الجَيِّدَةَ بِلَا مَعْرِفَةٍ لَا تَبْنِي جِسْرًا وَلَا تُعَالِجُ مَرِيضًا.</a:t>
@@ -14753,6 +14873,7 @@
                   <a:srgbClr val="1B3B6F"/>
                 </a:solidFill>
                 <a:latin typeface="Amiri" pitchFamily="2" charset="-78"/>
+                <a:ea typeface="Amiri" pitchFamily="2" charset="-78"/>
                 <a:cs typeface="Amiri" pitchFamily="2" charset="-78"/>
               </a:rPr>
               <a:t>أَلَيْسَتِ الصِّفَاتُ أَهَمَّ مِنَ الشَّهَادَاتِ؟</a:t>
@@ -14856,6 +14977,7 @@
                   <a:srgbClr val="1B3B6F"/>
                 </a:solidFill>
                 <a:latin typeface="Amiri" pitchFamily="2" charset="-78"/>
+                <a:ea typeface="Amiri" pitchFamily="2" charset="-78"/>
                 <a:cs typeface="Amiri" pitchFamily="2" charset="-78"/>
               </a:rPr>
               <a:t>لَوِ اسْتَطَعْتُ، لَاخْتَرْتُ الصَّبْرَ، لِأَنَّهُ الصِّفَةُ الَّتِي تَجْعَلُ كُلَّ الصِّفَاتِ الأُخْرَى تَنْمُو.</a:t>
@@ -14935,6 +15057,7 @@
                   <a:srgbClr val="1B3B6F"/>
                 </a:solidFill>
                 <a:latin typeface="Amiri" pitchFamily="2" charset="-78"/>
+                <a:ea typeface="Amiri" pitchFamily="2" charset="-78"/>
                 <a:cs typeface="Amiri" pitchFamily="2" charset="-78"/>
               </a:rPr>
               <a:t>لَوِ اسْتَطَعْتَ أَنْ تَكْتَسِبَ صِفَةً وَاحِدَةً فَوْرًا، مَاذَا تَخْتَارُ؟</a:t>
@@ -15144,6 +15267,7 @@
                   <a:srgbClr val="D4AF37"/>
                 </a:solidFill>
                 <a:latin typeface="Amiri" pitchFamily="2" charset="-78"/>
+                <a:ea typeface="Amiri" pitchFamily="2" charset="-78"/>
                 <a:cs typeface="Amiri" pitchFamily="2" charset="-78"/>
               </a:rPr>
               <a:t>م</a:t>
@@ -15464,6 +15588,7 @@
                   <a:srgbClr val="8A6D1E"/>
                 </a:solidFill>
                 <a:latin typeface="Amiri" pitchFamily="2" charset="-78"/>
+                <a:ea typeface="Amiri" pitchFamily="2" charset="-78"/>
                 <a:cs typeface="Amiri" pitchFamily="2" charset="-78"/>
               </a:rPr>
               <a:t>شَخْصِيَّتِي</a:t>
@@ -15744,6 +15869,7 @@
                   <a:srgbClr val="1B3B6F"/>
                 </a:solidFill>
                 <a:latin typeface="Amiri" pitchFamily="2" charset="-78"/>
+                <a:ea typeface="Amiri" pitchFamily="2" charset="-78"/>
                 <a:cs typeface="Amiri" pitchFamily="2" charset="-78"/>
               </a:rPr>
               <a:t>أَنَا … وَ…</a:t>
@@ -15820,6 +15946,7 @@
                   <a:srgbClr val="1B3B6F"/>
                 </a:solidFill>
                 <a:latin typeface="Amiri" pitchFamily="2" charset="-78"/>
+                <a:ea typeface="Amiri" pitchFamily="2" charset="-78"/>
                 <a:cs typeface="Amiri" pitchFamily="2" charset="-78"/>
               </a:rPr>
               <a:t>صِفْ شَخْصِيَّتَكَ.</a:t>
@@ -15988,6 +16115,7 @@
                   <a:srgbClr val="1B3B6F"/>
                 </a:solidFill>
                 <a:latin typeface="Amiri" pitchFamily="2" charset="-78"/>
+                <a:ea typeface="Amiri" pitchFamily="2" charset="-78"/>
                 <a:cs typeface="Amiri" pitchFamily="2" charset="-78"/>
               </a:rPr>
               <a:t>نُقْطَةُ قُوَّتِي …</a:t>
@@ -16064,6 +16192,7 @@
                   <a:srgbClr val="1B3B6F"/>
                 </a:solidFill>
                 <a:latin typeface="Amiri" pitchFamily="2" charset="-78"/>
+                <a:ea typeface="Amiri" pitchFamily="2" charset="-78"/>
                 <a:cs typeface="Amiri" pitchFamily="2" charset="-78"/>
               </a:rPr>
               <a:t>مَا نُقْطَةُ قُوَّتِكَ؟</a:t>
@@ -16232,6 +16361,7 @@
                   <a:srgbClr val="1B3B6F"/>
                 </a:solidFill>
                 <a:latin typeface="Amiri" pitchFamily="2" charset="-78"/>
+                <a:ea typeface="Amiri" pitchFamily="2" charset="-78"/>
                 <a:cs typeface="Amiri" pitchFamily="2" charset="-78"/>
               </a:rPr>
               <a:t>أَحْيَانًا أَنَا …</a:t>
@@ -16308,6 +16438,7 @@
                   <a:srgbClr val="1B3B6F"/>
                 </a:solidFill>
                 <a:latin typeface="Amiri" pitchFamily="2" charset="-78"/>
+                <a:ea typeface="Amiri" pitchFamily="2" charset="-78"/>
                 <a:cs typeface="Amiri" pitchFamily="2" charset="-78"/>
               </a:rPr>
               <a:t>مَا نُقْطَةُ ضَعْفِكَ؟</a:t>
@@ -16476,6 +16607,7 @@
                   <a:srgbClr val="1B3B6F"/>
                 </a:solidFill>
                 <a:latin typeface="Amiri" pitchFamily="2" charset="-78"/>
+                <a:ea typeface="Amiri" pitchFamily="2" charset="-78"/>
                 <a:cs typeface="Amiri" pitchFamily="2" charset="-78"/>
               </a:rPr>
               <a:t>صَدِيقِي … / صَدِيقَتِي …</a:t>
@@ -16552,6 +16684,7 @@
                   <a:srgbClr val="1B3B6F"/>
                 </a:solidFill>
                 <a:latin typeface="Amiri" pitchFamily="2" charset="-78"/>
+                <a:ea typeface="Amiri" pitchFamily="2" charset="-78"/>
                 <a:cs typeface="Amiri" pitchFamily="2" charset="-78"/>
               </a:rPr>
               <a:t>صِفْ صَدِيقَكَ المُفَضَّلَ.</a:t>
@@ -16720,6 +16853,7 @@
                   <a:srgbClr val="1B3B6F"/>
                 </a:solidFill>
                 <a:latin typeface="Amiri" pitchFamily="2" charset="-78"/>
+                <a:ea typeface="Amiri" pitchFamily="2" charset="-78"/>
                 <a:cs typeface="Amiri" pitchFamily="2" charset="-78"/>
               </a:rPr>
               <a:t>نَعَمْ، لِأَنِّي …</a:t>
@@ -16796,6 +16930,7 @@
                   <a:srgbClr val="1B3B6F"/>
                 </a:solidFill>
                 <a:latin typeface="Amiri" pitchFamily="2" charset="-78"/>
+                <a:ea typeface="Amiri" pitchFamily="2" charset="-78"/>
                 <a:cs typeface="Amiri" pitchFamily="2" charset="-78"/>
               </a:rPr>
               <a:t>هَلْ تُحِبُّ العَمَلَ فِي فَرِيقٍ؟</a:t>
@@ -16950,6 +17085,7 @@
                   <a:srgbClr val="1B3B6F"/>
                 </a:solidFill>
                 <a:latin typeface="Amiri" pitchFamily="2" charset="-78"/>
+                <a:ea typeface="Amiri" pitchFamily="2" charset="-78"/>
                 <a:cs typeface="Amiri" pitchFamily="2" charset="-78"/>
               </a:rPr>
               <a:t>عَفْوًا، هَلْ يُمْكِنُ أَنْ تُعِيدَ السُّؤَالَ؟</a:t>
@@ -17083,6 +17219,7 @@
                   <a:srgbClr val="D4AF37"/>
                 </a:solidFill>
                 <a:latin typeface="Amiri" pitchFamily="2" charset="-78"/>
+                <a:ea typeface="Amiri" pitchFamily="2" charset="-78"/>
                 <a:cs typeface="Amiri" pitchFamily="2" charset="-78"/>
               </a:rPr>
               <a:t>م</a:t>
@@ -17403,6 +17540,7 @@
                   <a:srgbClr val="8A6D1E"/>
                 </a:solidFill>
                 <a:latin typeface="Amiri" pitchFamily="2" charset="-78"/>
+                <a:ea typeface="Amiri" pitchFamily="2" charset="-78"/>
                 <a:cs typeface="Amiri" pitchFamily="2" charset="-78"/>
               </a:rPr>
               <a:t>الصِّفَاتُ وَالمِهَنُ</a:t>
@@ -17683,6 +17821,7 @@
                   <a:srgbClr val="1B3B6F"/>
                 </a:solidFill>
                 <a:latin typeface="Amiri" pitchFamily="2" charset="-78"/>
+                <a:ea typeface="Amiri" pitchFamily="2" charset="-78"/>
                 <a:cs typeface="Amiri" pitchFamily="2" charset="-78"/>
               </a:rPr>
               <a:t>يَحْتَاجُ الطَّبِيبُ إِلَى … لِأَنَّ …</a:t>
@@ -17759,6 +17898,7 @@
                   <a:srgbClr val="1B3B6F"/>
                 </a:solidFill>
                 <a:latin typeface="Amiri" pitchFamily="2" charset="-78"/>
+                <a:ea typeface="Amiri" pitchFamily="2" charset="-78"/>
                 <a:cs typeface="Amiri" pitchFamily="2" charset="-78"/>
               </a:rPr>
               <a:t>مَا الصِّفَاتُ الَّتِي يَحْتَاجُ إِلَيْهَا الطَّبِيبُ؟</a:t>
@@ -17862,6 +18002,7 @@
                   <a:srgbClr val="1B3B6F"/>
                 </a:solidFill>
                 <a:latin typeface="Amiri" pitchFamily="2" charset="-78"/>
+                <a:ea typeface="Amiri" pitchFamily="2" charset="-78"/>
                 <a:cs typeface="Amiri" pitchFamily="2" charset="-78"/>
               </a:rPr>
               <a:t>أَنَا … فَمَثَلًا …</a:t>
@@ -17938,6 +18079,7 @@
                   <a:srgbClr val="1B3B6F"/>
                 </a:solidFill>
                 <a:latin typeface="Amiri" pitchFamily="2" charset="-78"/>
+                <a:ea typeface="Amiri" pitchFamily="2" charset="-78"/>
                 <a:cs typeface="Amiri" pitchFamily="2" charset="-78"/>
               </a:rPr>
               <a:t>أَعْطِ مِثَالًا عَلَى صِفَةٍ إِيجَابِيَّةٍ عِنْدَكَ.</a:t>
@@ -18041,6 +18183,7 @@
                   <a:srgbClr val="1B3B6F"/>
                 </a:solidFill>
                 <a:latin typeface="Amiri" pitchFamily="2" charset="-78"/>
+                <a:ea typeface="Amiri" pitchFamily="2" charset="-78"/>
                 <a:cs typeface="Amiri" pitchFamily="2" charset="-78"/>
               </a:rPr>
               <a:t>أُعْجَبُ بِجَدَّتِي الَّتِي …</a:t>
@@ -18117,6 +18260,7 @@
                   <a:srgbClr val="1B3B6F"/>
                 </a:solidFill>
                 <a:latin typeface="Amiri" pitchFamily="2" charset="-78"/>
+                <a:ea typeface="Amiri" pitchFamily="2" charset="-78"/>
                 <a:cs typeface="Amiri" pitchFamily="2" charset="-78"/>
               </a:rPr>
               <a:t>صِفْ شَخْصًا تُعْجِبُكَ صِفَاتُهُ.</a:t>
@@ -18220,6 +18364,7 @@
                   <a:srgbClr val="1B3B6F"/>
                 </a:solidFill>
                 <a:latin typeface="Amiri" pitchFamily="2" charset="-78"/>
+                <a:ea typeface="Amiri" pitchFamily="2" charset="-78"/>
                 <a:cs typeface="Amiri" pitchFamily="2" charset="-78"/>
               </a:rPr>
               <a:t>كُنْتُ … أَمَّا الآنَ فَأَصْبَحْتُ …</a:t>
@@ -18296,6 +18441,7 @@
                   <a:srgbClr val="1B3B6F"/>
                 </a:solidFill>
                 <a:latin typeface="Amiri" pitchFamily="2" charset="-78"/>
+                <a:ea typeface="Amiri" pitchFamily="2" charset="-78"/>
                 <a:cs typeface="Amiri" pitchFamily="2" charset="-78"/>
               </a:rPr>
               <a:t>هَلْ تَغَيَّرَتْ شَخْصِيَّتُكَ؟</a:t>
@@ -18399,6 +18545,7 @@
                   <a:srgbClr val="1B3B6F"/>
                 </a:solidFill>
                 <a:latin typeface="Amiri" pitchFamily="2" charset="-78"/>
+                <a:ea typeface="Amiri" pitchFamily="2" charset="-78"/>
                 <a:cs typeface="Amiri" pitchFamily="2" charset="-78"/>
               </a:rPr>
               <a:t>تُنَاسِبُنِي … لِأَنِّي …</a:t>
@@ -18475,6 +18622,7 @@
                   <a:srgbClr val="1B3B6F"/>
                 </a:solidFill>
                 <a:latin typeface="Amiri" pitchFamily="2" charset="-78"/>
+                <a:ea typeface="Amiri" pitchFamily="2" charset="-78"/>
                 <a:cs typeface="Amiri" pitchFamily="2" charset="-78"/>
               </a:rPr>
               <a:t>أَيُّ وَظِيفَةٍ تُنَاسِبُ شَخْصِيَّتَكَ؟</a:t>
@@ -18684,6 +18832,7 @@
                   <a:srgbClr val="D4AF37"/>
                 </a:solidFill>
                 <a:latin typeface="Amiri" pitchFamily="2" charset="-78"/>
+                <a:ea typeface="Amiri" pitchFamily="2" charset="-78"/>
                 <a:cs typeface="Amiri" pitchFamily="2" charset="-78"/>
               </a:rPr>
               <a:t>م</a:t>
@@ -19004,6 +19153,7 @@
                   <a:srgbClr val="8A6D1E"/>
                 </a:solidFill>
                 <a:latin typeface="Amiri" pitchFamily="2" charset="-78"/>
+                <a:ea typeface="Amiri" pitchFamily="2" charset="-78"/>
                 <a:cs typeface="Amiri" pitchFamily="2" charset="-78"/>
               </a:rPr>
               <a:t>الشَّخْصِيَّةُ وَالنَّجَاحُ</a:t>
@@ -19284,6 +19434,7 @@
                   <a:srgbClr val="1B3B6F"/>
                 </a:solidFill>
                 <a:latin typeface="Amiri" pitchFamily="2" charset="-78"/>
+                <a:ea typeface="Amiri" pitchFamily="2" charset="-78"/>
                 <a:cs typeface="Amiri" pitchFamily="2" charset="-78"/>
               </a:rPr>
               <a:t>صَحِيحٌ أَنَّ … غَيْرَ أَنَّ …</a:t>
@@ -19360,6 +19511,7 @@
                   <a:srgbClr val="1B3B6F"/>
                 </a:solidFill>
                 <a:latin typeface="Amiri" pitchFamily="2" charset="-78"/>
+                <a:ea typeface="Amiri" pitchFamily="2" charset="-78"/>
                 <a:cs typeface="Amiri" pitchFamily="2" charset="-78"/>
               </a:rPr>
               <a:t>هَلِ الشَّخْصِيَّةُ أَهَمُّ مِنَ الشَّهَادَاتِ فِي العَمَلِ؟</a:t>
@@ -19463,6 +19615,7 @@
                   <a:srgbClr val="1B3B6F"/>
                 </a:solidFill>
                 <a:latin typeface="Amiri" pitchFamily="2" charset="-78"/>
+                <a:ea typeface="Amiri" pitchFamily="2" charset="-78"/>
                 <a:cs typeface="Amiri" pitchFamily="2" charset="-78"/>
               </a:rPr>
               <a:t>أَعْتَقِدُ أَنَّ … بِدَلِيلِ أَنَّ …</a:t>
@@ -19539,6 +19692,7 @@
                   <a:srgbClr val="1B3B6F"/>
                 </a:solidFill>
                 <a:latin typeface="Amiri" pitchFamily="2" charset="-78"/>
+                <a:ea typeface="Amiri" pitchFamily="2" charset="-78"/>
                 <a:cs typeface="Amiri" pitchFamily="2" charset="-78"/>
               </a:rPr>
               <a:t>هَلْ يُمْكِنُ أَنْ يُغَيِّرَ الإِنْسَانُ شَخْصِيَّتَهُ؟</a:t>
@@ -19642,6 +19796,7 @@
                   <a:srgbClr val="1B3B6F"/>
                 </a:solidFill>
                 <a:latin typeface="Amiri" pitchFamily="2" charset="-78"/>
+                <a:ea typeface="Amiri" pitchFamily="2" charset="-78"/>
                 <a:cs typeface="Amiri" pitchFamily="2" charset="-78"/>
               </a:rPr>
               <a:t>مِنْ نَاحِيَةٍ … وَمِنْ نَاحِيَةٍ أُخْرَى …</a:t>
@@ -19718,6 +19873,7 @@
                   <a:srgbClr val="1B3B6F"/>
                 </a:solidFill>
                 <a:latin typeface="Amiri" pitchFamily="2" charset="-78"/>
+                <a:ea typeface="Amiri" pitchFamily="2" charset="-78"/>
                 <a:cs typeface="Amiri" pitchFamily="2" charset="-78"/>
               </a:rPr>
               <a:t>هَلِ الانْطِوَائِيُّونَ أَقَلُّ نَجَاحًا فِي العَمَلِ؟</a:t>
@@ -19821,6 +19977,7 @@
                   <a:srgbClr val="1B3B6F"/>
                 </a:solidFill>
                 <a:latin typeface="Amiri" pitchFamily="2" charset="-78"/>
+                <a:ea typeface="Amiri" pitchFamily="2" charset="-78"/>
                 <a:cs typeface="Amiri" pitchFamily="2" charset="-78"/>
               </a:rPr>
               <a:t>سَيَحْتَاجُونَ إِلَى … لِأَنَّ …</a:t>
@@ -19897,6 +20054,7 @@
                   <a:srgbClr val="1B3B6F"/>
                 </a:solidFill>
                 <a:latin typeface="Amiri" pitchFamily="2" charset="-78"/>
+                <a:ea typeface="Amiri" pitchFamily="2" charset="-78"/>
                 <a:cs typeface="Amiri" pitchFamily="2" charset="-78"/>
               </a:rPr>
               <a:t>مَا الصِّفَاتُ الَّتِي سَيَحْتَاجُ إِلَيْهَا عُمَّالُ المُسْتَقْبَلِ؟</a:t>
@@ -20000,6 +20158,7 @@
                   <a:srgbClr val="1B3B6F"/>
                 </a:solidFill>
                 <a:latin typeface="Amiri" pitchFamily="2" charset="-78"/>
+                <a:ea typeface="Amiri" pitchFamily="2" charset="-78"/>
                 <a:cs typeface="Amiri" pitchFamily="2" charset="-78"/>
               </a:rPr>
               <a:t>لَوْ كُنْتُ مُدِيرًا، لَاخْتَرْتُ …</a:t>
@@ -20076,6 +20235,7 @@
                   <a:srgbClr val="1B3B6F"/>
                 </a:solidFill>
                 <a:latin typeface="Amiri" pitchFamily="2" charset="-78"/>
+                <a:ea typeface="Amiri" pitchFamily="2" charset="-78"/>
                 <a:cs typeface="Amiri" pitchFamily="2" charset="-78"/>
               </a:rPr>
               <a:t>لَوْ كُنْتَ مُدِيرًا، أَيَّ مُوَظَّفٍ تَخْتَارُ؟</a:t>
@@ -20285,6 +20445,7 @@
                   <a:srgbClr val="D4AF37"/>
                 </a:solidFill>
                 <a:latin typeface="Amiri" pitchFamily="2" charset="-78"/>
+                <a:ea typeface="Amiri" pitchFamily="2" charset="-78"/>
                 <a:cs typeface="Amiri" pitchFamily="2" charset="-78"/>
               </a:rPr>
               <a:t>م</a:t>
@@ -20605,6 +20766,7 @@
                   <a:srgbClr val="8A6D1E"/>
                 </a:solidFill>
                 <a:latin typeface="Amiri" pitchFamily="2" charset="-78"/>
+                <a:ea typeface="Amiri" pitchFamily="2" charset="-78"/>
                 <a:cs typeface="Amiri" pitchFamily="2" charset="-78"/>
               </a:rPr>
               <a:t>آدَابُ الصَّفِّ</a:t>
@@ -22136,6 +22298,7 @@
                   <a:srgbClr val="D4AF37"/>
                 </a:solidFill>
                 <a:latin typeface="Amiri" pitchFamily="2" charset="-78"/>
+                <a:ea typeface="Amiri" pitchFamily="2" charset="-78"/>
                 <a:cs typeface="Amiri" pitchFamily="2" charset="-78"/>
               </a:rPr>
               <a:t>م</a:t>
@@ -22456,6 +22619,7 @@
                   <a:srgbClr val="8A6D1E"/>
                 </a:solidFill>
                 <a:latin typeface="Amiri" pitchFamily="2" charset="-78"/>
+                <a:ea typeface="Amiri" pitchFamily="2" charset="-78"/>
                 <a:cs typeface="Amiri" pitchFamily="2" charset="-78"/>
               </a:rPr>
               <a:t>نَمُوذَجُ الإِجَابَةِ</a:t>
@@ -22698,6 +22862,7 @@
                   <a:srgbClr val="1B3B6F"/>
                 </a:solidFill>
                 <a:latin typeface="Amiri" pitchFamily="2" charset="-78"/>
+                <a:ea typeface="Amiri" pitchFamily="2" charset="-78"/>
                 <a:cs typeface="Amiri" pitchFamily="2" charset="-78"/>
               </a:rPr>
               <a:t>أَنَا اجْتِمَاعِيٌّ وَمُتَعَاوِنٌ.</a:t>
@@ -22774,6 +22939,7 @@
                   <a:srgbClr val="1B3B6F"/>
                 </a:solidFill>
                 <a:latin typeface="Amiri" pitchFamily="2" charset="-78"/>
+                <a:ea typeface="Amiri" pitchFamily="2" charset="-78"/>
                 <a:cs typeface="Amiri" pitchFamily="2" charset="-78"/>
               </a:rPr>
               <a:t>صِفْ شَخْصِيَّتَكَ.</a:t>
@@ -22877,6 +23043,7 @@
                   <a:srgbClr val="1B3B6F"/>
                 </a:solidFill>
                 <a:latin typeface="Amiri" pitchFamily="2" charset="-78"/>
+                <a:ea typeface="Amiri" pitchFamily="2" charset="-78"/>
                 <a:cs typeface="Amiri" pitchFamily="2" charset="-78"/>
               </a:rPr>
               <a:t>نُقْطَةُ قُوَّتِي التَّنْظِيمُ.</a:t>
@@ -22953,6 +23120,7 @@
                   <a:srgbClr val="1B3B6F"/>
                 </a:solidFill>
                 <a:latin typeface="Amiri" pitchFamily="2" charset="-78"/>
+                <a:ea typeface="Amiri" pitchFamily="2" charset="-78"/>
                 <a:cs typeface="Amiri" pitchFamily="2" charset="-78"/>
               </a:rPr>
               <a:t>مَا نُقْطَةُ قُوَّتِكَ؟</a:t>
@@ -23056,6 +23224,7 @@
                   <a:srgbClr val="1B3B6F"/>
                 </a:solidFill>
                 <a:latin typeface="Amiri" pitchFamily="2" charset="-78"/>
+                <a:ea typeface="Amiri" pitchFamily="2" charset="-78"/>
                 <a:cs typeface="Amiri" pitchFamily="2" charset="-78"/>
               </a:rPr>
               <a:t>أَحْيَانًا أَنَا كَسُولٌ فِي الصَّبَاحِ!</a:t>
@@ -23132,6 +23301,7 @@
                   <a:srgbClr val="1B3B6F"/>
                 </a:solidFill>
                 <a:latin typeface="Amiri" pitchFamily="2" charset="-78"/>
+                <a:ea typeface="Amiri" pitchFamily="2" charset="-78"/>
                 <a:cs typeface="Amiri" pitchFamily="2" charset="-78"/>
               </a:rPr>
               <a:t>مَا نُقْطَةُ ضَعْفِكَ؟</a:t>
@@ -23235,6 +23405,7 @@
                   <a:srgbClr val="1B3B6F"/>
                 </a:solidFill>
                 <a:latin typeface="Amiri" pitchFamily="2" charset="-78"/>
+                <a:ea typeface="Amiri" pitchFamily="2" charset="-78"/>
                 <a:cs typeface="Amiri" pitchFamily="2" charset="-78"/>
               </a:rPr>
               <a:t>صَدِيقَتِي مَرَحَةٌ وَصَادِقَةٌ.</a:t>
@@ -23311,6 +23482,7 @@
                   <a:srgbClr val="1B3B6F"/>
                 </a:solidFill>
                 <a:latin typeface="Amiri" pitchFamily="2" charset="-78"/>
+                <a:ea typeface="Amiri" pitchFamily="2" charset="-78"/>
                 <a:cs typeface="Amiri" pitchFamily="2" charset="-78"/>
               </a:rPr>
               <a:t>صِفْ صَدِيقَكَ المُفَضَّلَ.</a:t>
@@ -23414,6 +23586,7 @@
                   <a:srgbClr val="1B3B6F"/>
                 </a:solidFill>
                 <a:latin typeface="Amiri" pitchFamily="2" charset="-78"/>
+                <a:ea typeface="Amiri" pitchFamily="2" charset="-78"/>
                 <a:cs typeface="Amiri" pitchFamily="2" charset="-78"/>
               </a:rPr>
               <a:t>نَعَمْ، لِأَنِّي أَتَعَلَّمُ مِنَ الآخَرِينَ.</a:t>
@@ -23490,6 +23663,7 @@
                   <a:srgbClr val="1B3B6F"/>
                 </a:solidFill>
                 <a:latin typeface="Amiri" pitchFamily="2" charset="-78"/>
+                <a:ea typeface="Amiri" pitchFamily="2" charset="-78"/>
                 <a:cs typeface="Amiri" pitchFamily="2" charset="-78"/>
               </a:rPr>
               <a:t>هَلْ تُحِبُّ العَمَلَ فِي فَرِيقٍ؟</a:t>
@@ -23699,6 +23873,7 @@
                   <a:srgbClr val="D4AF37"/>
                 </a:solidFill>
                 <a:latin typeface="Amiri" pitchFamily="2" charset="-78"/>
+                <a:ea typeface="Amiri" pitchFamily="2" charset="-78"/>
                 <a:cs typeface="Amiri" pitchFamily="2" charset="-78"/>
               </a:rPr>
               <a:t>م</a:t>
@@ -24019,6 +24194,7 @@
                   <a:srgbClr val="8A6D1E"/>
                 </a:solidFill>
                 <a:latin typeface="Amiri" pitchFamily="2" charset="-78"/>
+                <a:ea typeface="Amiri" pitchFamily="2" charset="-78"/>
                 <a:cs typeface="Amiri" pitchFamily="2" charset="-78"/>
               </a:rPr>
               <a:t>نَمُوذَجُ الإِجَابَةِ</a:t>
@@ -24261,6 +24437,7 @@
                   <a:srgbClr val="1B3B6F"/>
                 </a:solidFill>
                 <a:latin typeface="Amiri" pitchFamily="2" charset="-78"/>
+                <a:ea typeface="Amiri" pitchFamily="2" charset="-78"/>
                 <a:cs typeface="Amiri" pitchFamily="2" charset="-78"/>
               </a:rPr>
               <a:t>يَحْتَاجُ الطَّبِيبُ إِلَى الدِّقَّةِ وَالهُدُوءِ، لِأَنَّ خَطَأً صَغِيرًا قَدْ يَكُونُ خَطِيرًا جِدًّا.</a:t>
@@ -24337,6 +24514,7 @@
                   <a:srgbClr val="1B3B6F"/>
                 </a:solidFill>
                 <a:latin typeface="Amiri" pitchFamily="2" charset="-78"/>
+                <a:ea typeface="Amiri" pitchFamily="2" charset="-78"/>
                 <a:cs typeface="Amiri" pitchFamily="2" charset="-78"/>
               </a:rPr>
               <a:t>مَا الصِّفَاتُ الَّتِي يَحْتَاجُ إِلَيْهَا الطَّبِيبُ؟</a:t>
@@ -24440,6 +24618,7 @@
                   <a:srgbClr val="1B3B6F"/>
                 </a:solidFill>
                 <a:latin typeface="Amiri" pitchFamily="2" charset="-78"/>
+                <a:ea typeface="Amiri" pitchFamily="2" charset="-78"/>
                 <a:cs typeface="Amiri" pitchFamily="2" charset="-78"/>
               </a:rPr>
               <a:t>أَنَا مَسْؤُولٌ؛ فَمَثَلًا أَعْتَنِي بِأَخِي الصَّغِيرِ بَعْدَ المَدْرَسَةِ حَتَّى يَعُودَ وَالِدَايَ مِنَ العَمَلِ.</a:t>
@@ -24516,6 +24695,7 @@
                   <a:srgbClr val="1B3B6F"/>
                 </a:solidFill>
                 <a:latin typeface="Amiri" pitchFamily="2" charset="-78"/>
+                <a:ea typeface="Amiri" pitchFamily="2" charset="-78"/>
                 <a:cs typeface="Amiri" pitchFamily="2" charset="-78"/>
               </a:rPr>
               <a:t>أَعْطِ مِثَالًا عَلَى صِفَةٍ إِيجَابِيَّةٍ عِنْدَكَ.</a:t>
@@ -24619,6 +24799,7 @@
                   <a:srgbClr val="1B3B6F"/>
                 </a:solidFill>
                 <a:latin typeface="Amiri" pitchFamily="2" charset="-78"/>
+                <a:ea typeface="Amiri" pitchFamily="2" charset="-78"/>
                 <a:cs typeface="Amiri" pitchFamily="2" charset="-78"/>
               </a:rPr>
               <a:t>أُعْجَبُ بِجَدَّتِي الَّتِي رَبَّتْ سِتَّةَ أَطْفَالٍ وَعَمِلَتْ فِي الوَقْتِ نَفْسِهِ، لِأَنَّهَا قَوِيَّةٌ وَصَبُورَةٌ.</a:t>
@@ -24695,6 +24876,7 @@
                   <a:srgbClr val="1B3B6F"/>
                 </a:solidFill>
                 <a:latin typeface="Amiri" pitchFamily="2" charset="-78"/>
+                <a:ea typeface="Amiri" pitchFamily="2" charset="-78"/>
                 <a:cs typeface="Amiri" pitchFamily="2" charset="-78"/>
               </a:rPr>
               <a:t>صِفْ شَخْصًا تُعْجِبُكَ صِفَاتُهُ.</a:t>
@@ -24798,6 +24980,7 @@
                   <a:srgbClr val="1B3B6F"/>
                 </a:solidFill>
                 <a:latin typeface="Amiri" pitchFamily="2" charset="-78"/>
+                <a:ea typeface="Amiri" pitchFamily="2" charset="-78"/>
                 <a:cs typeface="Amiri" pitchFamily="2" charset="-78"/>
               </a:rPr>
               <a:t>كُنْتُ عَصَبِيًّا وَأَنَا صَغِيرٌ، أَمَّا الآنَ فَأَصْبَحْتُ أَهْدَأَ بِفَضْلِ الرِّيَاضَةِ.</a:t>
@@ -24874,6 +25057,7 @@
                   <a:srgbClr val="1B3B6F"/>
                 </a:solidFill>
                 <a:latin typeface="Amiri" pitchFamily="2" charset="-78"/>
+                <a:ea typeface="Amiri" pitchFamily="2" charset="-78"/>
                 <a:cs typeface="Amiri" pitchFamily="2" charset="-78"/>
               </a:rPr>
               <a:t>هَلْ تَغَيَّرَتْ شَخْصِيَّتُكَ؟</a:t>
@@ -24977,6 +25161,7 @@
                   <a:srgbClr val="1B3B6F"/>
                 </a:solidFill>
                 <a:latin typeface="Amiri" pitchFamily="2" charset="-78"/>
+                <a:ea typeface="Amiri" pitchFamily="2" charset="-78"/>
                 <a:cs typeface="Amiri" pitchFamily="2" charset="-78"/>
               </a:rPr>
               <a:t>تُنَاسِبُنِي وَظِيفَةُ المُهَنْدِسِ، لِأَنِّي دَقِيقٌ، وَأُحِبُّ حَلَّ المُشْكِلَاتِ.</a:t>
@@ -25053,6 +25238,7 @@
                   <a:srgbClr val="1B3B6F"/>
                 </a:solidFill>
                 <a:latin typeface="Amiri" pitchFamily="2" charset="-78"/>
+                <a:ea typeface="Amiri" pitchFamily="2" charset="-78"/>
                 <a:cs typeface="Amiri" pitchFamily="2" charset="-78"/>
               </a:rPr>
               <a:t>أَيُّ وَظِيفَةٍ تُنَاسِبُ شَخْصِيَّتَكَ؟</a:t>
@@ -25262,6 +25448,7 @@
                   <a:srgbClr val="D4AF37"/>
                 </a:solidFill>
                 <a:latin typeface="Amiri" pitchFamily="2" charset="-78"/>
+                <a:ea typeface="Amiri" pitchFamily="2" charset="-78"/>
                 <a:cs typeface="Amiri" pitchFamily="2" charset="-78"/>
               </a:rPr>
               <a:t>م</a:t>
@@ -25582,6 +25769,7 @@
                   <a:srgbClr val="8A6D1E"/>
                 </a:solidFill>
                 <a:latin typeface="Amiri" pitchFamily="2" charset="-78"/>
+                <a:ea typeface="Amiri" pitchFamily="2" charset="-78"/>
                 <a:cs typeface="Amiri" pitchFamily="2" charset="-78"/>
               </a:rPr>
               <a:t>نَمُوذَجُ الإِجَابَةِ</a:t>
@@ -25824,6 +26012,7 @@
                   <a:srgbClr val="1B3B6F"/>
                 </a:solidFill>
                 <a:latin typeface="Amiri" pitchFamily="2" charset="-78"/>
+                <a:ea typeface="Amiri" pitchFamily="2" charset="-78"/>
                 <a:cs typeface="Amiri" pitchFamily="2" charset="-78"/>
               </a:rPr>
               <a:t>صَحِيحٌ أَنَّ الشَّهَادَاتِ تَفْتَحُ البَابَ، غَيْرَ أَنَّ الصِّفَاتِ كَالأَمَانَةِ وَالتَّعَاوُنِ هِيَ الَّتِي تَجْعَلُكَ تَبْقَى وَتَتَقَدَّمُ.</a:t>
@@ -25900,6 +26089,7 @@
                   <a:srgbClr val="1B3B6F"/>
                 </a:solidFill>
                 <a:latin typeface="Amiri" pitchFamily="2" charset="-78"/>
+                <a:ea typeface="Amiri" pitchFamily="2" charset="-78"/>
                 <a:cs typeface="Amiri" pitchFamily="2" charset="-78"/>
               </a:rPr>
               <a:t>هَلِ الشَّخْصِيَّةُ أَهَمُّ مِنَ الشَّهَادَاتِ فِي العَمَلِ؟</a:t>
@@ -26003,6 +26193,7 @@
                   <a:srgbClr val="1B3B6F"/>
                 </a:solidFill>
                 <a:latin typeface="Amiri" pitchFamily="2" charset="-78"/>
+                <a:ea typeface="Amiri" pitchFamily="2" charset="-78"/>
                 <a:cs typeface="Amiri" pitchFamily="2" charset="-78"/>
               </a:rPr>
               <a:t>أَعْتَقِدُ أَنَّهُ يَسْتَطِيعُ أَنْ يُطَوِّرَهَا، بِدَلِيلِ أَنَّ أَخِي الخَجُولَ أَصْبَحَ مُعَلِّمًا يَتَكَلَّمُ أَمَامَ الصَّفِّ كُلَّ يَوْمٍ.</a:t>
@@ -26079,6 +26270,7 @@
                   <a:srgbClr val="1B3B6F"/>
                 </a:solidFill>
                 <a:latin typeface="Amiri" pitchFamily="2" charset="-78"/>
+                <a:ea typeface="Amiri" pitchFamily="2" charset="-78"/>
                 <a:cs typeface="Amiri" pitchFamily="2" charset="-78"/>
               </a:rPr>
               <a:t>هَلْ يُمْكِنُ أَنْ يُغَيِّرَ الإِنْسَانُ شَخْصِيَّتَهُ؟</a:t>
@@ -26182,6 +26374,7 @@
                   <a:srgbClr val="1B3B6F"/>
                 </a:solidFill>
                 <a:latin typeface="Amiri" pitchFamily="2" charset="-78"/>
+                <a:ea typeface="Amiri" pitchFamily="2" charset="-78"/>
                 <a:cs typeface="Amiri" pitchFamily="2" charset="-78"/>
               </a:rPr>
               <a:t>مِنْ نَاحِيَةٍ، قَدْ يَجِدُونَ الاجْتِمَاعَاتِ صَعْبَةً، وَمِنْ نَاحِيَةٍ أُخْرَى، يَتَمَيَّزُونَ بِالتَّرْكِيزِ وَالاسْتِمَاعِ الجَيِّدِ.</a:t>
@@ -26258,6 +26451,7 @@
                   <a:srgbClr val="1B3B6F"/>
                 </a:solidFill>
                 <a:latin typeface="Amiri" pitchFamily="2" charset="-78"/>
+                <a:ea typeface="Amiri" pitchFamily="2" charset="-78"/>
                 <a:cs typeface="Amiri" pitchFamily="2" charset="-78"/>
               </a:rPr>
               <a:t>هَلِ الانْطِوَائِيُّونَ أَقَلُّ نَجَاحًا فِي العَمَلِ؟</a:t>
@@ -26467,6 +26661,7 @@
                   <a:srgbClr val="D4AF37"/>
                 </a:solidFill>
                 <a:latin typeface="Amiri" pitchFamily="2" charset="-78"/>
+                <a:ea typeface="Amiri" pitchFamily="2" charset="-78"/>
                 <a:cs typeface="Amiri" pitchFamily="2" charset="-78"/>
               </a:rPr>
               <a:t>م</a:t>
@@ -26787,6 +26982,7 @@
                   <a:srgbClr val="8A6D1E"/>
                 </a:solidFill>
                 <a:latin typeface="Amiri" pitchFamily="2" charset="-78"/>
+                <a:ea typeface="Amiri" pitchFamily="2" charset="-78"/>
                 <a:cs typeface="Amiri" pitchFamily="2" charset="-78"/>
               </a:rPr>
               <a:t>نَمُوذَجُ الإِجَابَةِ</a:t>
@@ -27029,6 +27225,7 @@
                   <a:srgbClr val="1B3B6F"/>
                 </a:solidFill>
                 <a:latin typeface="Amiri" pitchFamily="2" charset="-78"/>
+                <a:ea typeface="Amiri" pitchFamily="2" charset="-78"/>
                 <a:cs typeface="Amiri" pitchFamily="2" charset="-78"/>
               </a:rPr>
               <a:t>سَيَحْتَاجُونَ إِلَى المُرُونَةِ وَحُبِّ التَّعَلُّمِ، لِأَنَّ الآلَاتِ سَتَقُومُ بِالأَعْمَالِ المُتَكَرِّرَةِ.</a:t>
@@ -27108,6 +27305,7 @@
                   <a:srgbClr val="1B3B6F"/>
                 </a:solidFill>
                 <a:latin typeface="Amiri" pitchFamily="2" charset="-78"/>
+                <a:ea typeface="Amiri" pitchFamily="2" charset="-78"/>
                 <a:cs typeface="Amiri" pitchFamily="2" charset="-78"/>
               </a:rPr>
               <a:t>مَا الصِّفَاتُ الَّتِي سَيَحْتَاجُ إِلَيْهَا عُمَّالُ المُسْتَقْبَلِ؟</a:t>
@@ -27211,6 +27409,7 @@
                   <a:srgbClr val="1B3B6F"/>
                 </a:solidFill>
                 <a:latin typeface="Amiri" pitchFamily="2" charset="-78"/>
+                <a:ea typeface="Amiri" pitchFamily="2" charset="-78"/>
                 <a:cs typeface="Amiri" pitchFamily="2" charset="-78"/>
               </a:rPr>
               <a:t>لَوْ كُنْتُ مُدِيرًا، لَاخْتَرْتُ المُوَظَّفَ الَّذِي يَعْتَرِفُ بِأَخْطَائِهِ وَيَتَعَلَّمُ مِنْهَا، لَا الَّذِي يَدَّعِي أَنَّهُ لَا يُخْطِئُ.</a:t>
@@ -27287,6 +27486,7 @@
                   <a:srgbClr val="1B3B6F"/>
                 </a:solidFill>
                 <a:latin typeface="Amiri" pitchFamily="2" charset="-78"/>
+                <a:ea typeface="Amiri" pitchFamily="2" charset="-78"/>
                 <a:cs typeface="Amiri" pitchFamily="2" charset="-78"/>
               </a:rPr>
               <a:t>لَوْ كُنْتَ مُدِيرًا، أَيَّ مُوَظَّفٍ تَخْتَارُ؟</a:t>
@@ -27496,6 +27696,7 @@
                   <a:srgbClr val="D4AF37"/>
                 </a:solidFill>
                 <a:latin typeface="Amiri" pitchFamily="2" charset="-78"/>
+                <a:ea typeface="Amiri" pitchFamily="2" charset="-78"/>
                 <a:cs typeface="Amiri" pitchFamily="2" charset="-78"/>
               </a:rPr>
               <a:t>م</a:t>
@@ -27816,6 +28017,7 @@
                   <a:srgbClr val="8A6D1E"/>
                 </a:solidFill>
                 <a:latin typeface="Amiri" pitchFamily="2" charset="-78"/>
+                <a:ea typeface="Amiri" pitchFamily="2" charset="-78"/>
                 <a:cs typeface="Amiri" pitchFamily="2" charset="-78"/>
               </a:rPr>
               <a:t>قَيِّمْ عَمَلَكَ</a:t>
@@ -29060,6 +29262,7 @@
                   <a:srgbClr val="FFFFFF"/>
                 </a:solidFill>
                 <a:latin typeface="Amiri" pitchFamily="2" charset="-78"/>
+                <a:ea typeface="Amiri" pitchFamily="2" charset="-78"/>
                 <a:cs typeface="Amiri" pitchFamily="2" charset="-78"/>
               </a:rPr>
               <a:t>أَحْسَنْتُمْ! إِلَى اللِّقَاءِ</a:t>
@@ -29212,6 +29415,7 @@
                   <a:srgbClr val="D4AF37"/>
                 </a:solidFill>
                 <a:latin typeface="Amiri" pitchFamily="2" charset="-78"/>
+                <a:ea typeface="Amiri" pitchFamily="2" charset="-78"/>
                 <a:cs typeface="Amiri" pitchFamily="2" charset="-78"/>
               </a:rPr>
               <a:t>وَرْشَةُ الكِتَابَةِ</a:t>
@@ -29345,6 +29549,7 @@
                   <a:srgbClr val="D4AF37"/>
                 </a:solidFill>
                 <a:latin typeface="Amiri" pitchFamily="2" charset="-78"/>
+                <a:ea typeface="Amiri" pitchFamily="2" charset="-78"/>
                 <a:cs typeface="Amiri" pitchFamily="2" charset="-78"/>
               </a:rPr>
               <a:t>م</a:t>
@@ -29665,6 +29870,7 @@
                   <a:srgbClr val="8A6D1E"/>
                 </a:solidFill>
                 <a:latin typeface="Amiri" pitchFamily="2" charset="-78"/>
+                <a:ea typeface="Amiri" pitchFamily="2" charset="-78"/>
                 <a:cs typeface="Amiri" pitchFamily="2" charset="-78"/>
               </a:rPr>
               <a:t>خَرِيطَةُ الوَرْشَةِ</a:t>
@@ -29979,6 +30185,7 @@
                   <a:srgbClr val="1B3B6F"/>
                 </a:solidFill>
                 <a:latin typeface="Amiri" pitchFamily="2" charset="-78"/>
+                <a:ea typeface="Amiri" pitchFamily="2" charset="-78"/>
                 <a:cs typeface="Amiri" pitchFamily="2" charset="-78"/>
               </a:rPr>
               <a:t>كَيْفَ</a:t>
@@ -30255,6 +30462,7 @@
                   <a:srgbClr val="1E6B52"/>
                 </a:solidFill>
                 <a:latin typeface="Amiri" pitchFamily="2" charset="-78"/>
+                <a:ea typeface="Amiri" pitchFamily="2" charset="-78"/>
                 <a:cs typeface="Amiri" pitchFamily="2" charset="-78"/>
               </a:rPr>
               <a:t>تَمْثِيلُ الدَّوْرِ</a:t>
@@ -30531,6 +30739,7 @@
                   <a:srgbClr val="8A6D1E"/>
                 </a:solidFill>
                 <a:latin typeface="Amiri" pitchFamily="2" charset="-78"/>
+                <a:ea typeface="Amiri" pitchFamily="2" charset="-78"/>
                 <a:cs typeface="Amiri" pitchFamily="2" charset="-78"/>
               </a:rPr>
               <a:t>النَّمُوذَجُ</a:t>
@@ -30807,6 +31016,7 @@
                   <a:srgbClr val="1E6B52"/>
                 </a:solidFill>
                 <a:latin typeface="Amiri" pitchFamily="2" charset="-78"/>
+                <a:ea typeface="Amiri" pitchFamily="2" charset="-78"/>
                 <a:cs typeface="Amiri" pitchFamily="2" charset="-78"/>
               </a:rPr>
               <a:t>المُحَادَثَةُ</a:t>
@@ -31083,6 +31293,7 @@
                   <a:srgbClr val="8A6D1E"/>
                 </a:solidFill>
                 <a:latin typeface="Amiri" pitchFamily="2" charset="-78"/>
+                <a:ea typeface="Amiri" pitchFamily="2" charset="-78"/>
                 <a:cs typeface="Amiri" pitchFamily="2" charset="-78"/>
               </a:rPr>
               <a:t>قَيِّمْ</a:t>
@@ -31326,6 +31537,7 @@
                   <a:srgbClr val="D4AF37"/>
                 </a:solidFill>
                 <a:latin typeface="Amiri" pitchFamily="2" charset="-78"/>
+                <a:ea typeface="Amiri" pitchFamily="2" charset="-78"/>
                 <a:cs typeface="Amiri" pitchFamily="2" charset="-78"/>
               </a:rPr>
               <a:t>م</a:t>
@@ -31646,6 +31858,7 @@
                   <a:srgbClr val="8A6D1E"/>
                 </a:solidFill>
                 <a:latin typeface="Amiri" pitchFamily="2" charset="-78"/>
+                <a:ea typeface="Amiri" pitchFamily="2" charset="-78"/>
                 <a:cs typeface="Amiri" pitchFamily="2" charset="-78"/>
               </a:rPr>
               <a:t>امْتِحَانُ التَّحَدُّثِ</a:t>
@@ -32270,6 +32483,7 @@
                   <a:srgbClr val="1B3B6F"/>
                 </a:solidFill>
                 <a:latin typeface="Amiri" pitchFamily="2" charset="-78"/>
+                <a:ea typeface="Amiri" pitchFamily="2" charset="-78"/>
                 <a:cs typeface="Amiri" pitchFamily="2" charset="-78"/>
               </a:rPr>
               <a:t>عَفْوًا، هَلْ يُمْكِنُ أَنْ تُعِيدَ السُّؤَالَ؟</a:t>
@@ -32369,6 +32583,7 @@
                   <a:srgbClr val="1B3B6F"/>
                 </a:solidFill>
                 <a:latin typeface="Amiri" pitchFamily="2" charset="-78"/>
+                <a:ea typeface="Amiri" pitchFamily="2" charset="-78"/>
                 <a:cs typeface="Amiri" pitchFamily="2" charset="-78"/>
               </a:rPr>
               <a:t>لَحْظَةً، دَعْنِي أُفَكِّرُ …</a:t>
@@ -32468,6 +32683,7 @@
                   <a:srgbClr val="1B3B6F"/>
                 </a:solidFill>
                 <a:latin typeface="Amiri" pitchFamily="2" charset="-78"/>
+                <a:ea typeface="Amiri" pitchFamily="2" charset="-78"/>
                 <a:cs typeface="Amiri" pitchFamily="2" charset="-78"/>
               </a:rPr>
               <a:t>أَقْصِدُ …</a:t>
@@ -32639,6 +32855,7 @@
                   <a:srgbClr val="D4AF37"/>
                 </a:solidFill>
                 <a:latin typeface="Amiri" pitchFamily="2" charset="-78"/>
+                <a:ea typeface="Amiri" pitchFamily="2" charset="-78"/>
                 <a:cs typeface="Amiri" pitchFamily="2" charset="-78"/>
               </a:rPr>
               <a:t>م</a:t>
@@ -32959,6 +33176,7 @@
                   <a:srgbClr val="8A6D1E"/>
                 </a:solidFill>
                 <a:latin typeface="Amiri" pitchFamily="2" charset="-78"/>
+                <a:ea typeface="Amiri" pitchFamily="2" charset="-78"/>
                 <a:cs typeface="Amiri" pitchFamily="2" charset="-78"/>
               </a:rPr>
               <a:t>الصِّفَاتُ الشَّخْصِيَّةُ</a:t>
@@ -33262,6 +33480,7 @@
                   <a:srgbClr val="1B3B6F"/>
                 </a:solidFill>
                 <a:latin typeface="Amiri" pitchFamily="2" charset="-78"/>
+                <a:ea typeface="Amiri" pitchFamily="2" charset="-78"/>
                 <a:cs typeface="Amiri" pitchFamily="2" charset="-78"/>
               </a:rPr>
               <a:t>صَبُورٌ</a:t>
@@ -33419,6 +33638,7 @@
                   <a:srgbClr val="1B3B6F"/>
                 </a:solidFill>
                 <a:latin typeface="Amiri" pitchFamily="2" charset="-78"/>
+                <a:ea typeface="Amiri" pitchFamily="2" charset="-78"/>
                 <a:cs typeface="Amiri" pitchFamily="2" charset="-78"/>
               </a:rPr>
               <a:t>الصَّبْرُ</a:t>
@@ -33522,6 +33742,7 @@
                   <a:srgbClr val="1B3B6F"/>
                 </a:solidFill>
                 <a:latin typeface="Amiri" pitchFamily="2" charset="-78"/>
+                <a:ea typeface="Amiri" pitchFamily="2" charset="-78"/>
                 <a:cs typeface="Amiri" pitchFamily="2" charset="-78"/>
               </a:rPr>
               <a:t>صَبُورَةٌ · صَبُورٌ</a:t>
@@ -33787,6 +34008,7 @@
                   <a:srgbClr val="1B3B6F"/>
                 </a:solidFill>
                 <a:latin typeface="Amiri" pitchFamily="2" charset="-78"/>
+                <a:ea typeface="Amiri" pitchFamily="2" charset="-78"/>
                 <a:cs typeface="Amiri" pitchFamily="2" charset="-78"/>
               </a:rPr>
               <a:t>مُنَظَّمٌ</a:t>
@@ -33944,6 +34166,7 @@
                   <a:srgbClr val="1B3B6F"/>
                 </a:solidFill>
                 <a:latin typeface="Amiri" pitchFamily="2" charset="-78"/>
+                <a:ea typeface="Amiri" pitchFamily="2" charset="-78"/>
                 <a:cs typeface="Amiri" pitchFamily="2" charset="-78"/>
               </a:rPr>
               <a:t>التَّنْظِيمُ</a:t>
@@ -34047,6 +34270,7 @@
                   <a:srgbClr val="1B3B6F"/>
                 </a:solidFill>
                 <a:latin typeface="Amiri" pitchFamily="2" charset="-78"/>
+                <a:ea typeface="Amiri" pitchFamily="2" charset="-78"/>
                 <a:cs typeface="Amiri" pitchFamily="2" charset="-78"/>
               </a:rPr>
               <a:t>مُنَظَّمُونَ</a:t>
@@ -34150,6 +34374,7 @@
                   <a:srgbClr val="1B3B6F"/>
                 </a:solidFill>
                 <a:latin typeface="Amiri" pitchFamily="2" charset="-78"/>
+                <a:ea typeface="Amiri" pitchFamily="2" charset="-78"/>
                 <a:cs typeface="Amiri" pitchFamily="2" charset="-78"/>
               </a:rPr>
               <a:t>مُنَظَّمَةٌ</a:t>
@@ -34415,6 +34640,7 @@
                   <a:srgbClr val="1B3B6F"/>
                 </a:solidFill>
                 <a:latin typeface="Amiri" pitchFamily="2" charset="-78"/>
+                <a:ea typeface="Amiri" pitchFamily="2" charset="-78"/>
                 <a:cs typeface="Amiri" pitchFamily="2" charset="-78"/>
               </a:rPr>
               <a:t>مَسْؤُولٌ</a:t>
@@ -34572,6 +34798,7 @@
                   <a:srgbClr val="1B3B6F"/>
                 </a:solidFill>
                 <a:latin typeface="Amiri" pitchFamily="2" charset="-78"/>
+                <a:ea typeface="Amiri" pitchFamily="2" charset="-78"/>
                 <a:cs typeface="Amiri" pitchFamily="2" charset="-78"/>
               </a:rPr>
               <a:t>المَسْؤُولِيَّةُ</a:t>
@@ -34675,6 +34902,7 @@
                   <a:srgbClr val="1B3B6F"/>
                 </a:solidFill>
                 <a:latin typeface="Amiri" pitchFamily="2" charset="-78"/>
+                <a:ea typeface="Amiri" pitchFamily="2" charset="-78"/>
                 <a:cs typeface="Amiri" pitchFamily="2" charset="-78"/>
               </a:rPr>
               <a:t>مَسْؤُولَةٌ</a:t>
@@ -34940,6 +35168,7 @@
                   <a:srgbClr val="1B3B6F"/>
                 </a:solidFill>
                 <a:latin typeface="Amiri" pitchFamily="2" charset="-78"/>
+                <a:ea typeface="Amiri" pitchFamily="2" charset="-78"/>
                 <a:cs typeface="Amiri" pitchFamily="2" charset="-78"/>
               </a:rPr>
               <a:t>مُبْدِعٌ</a:t>
@@ -35097,6 +35326,7 @@
                   <a:srgbClr val="1B3B6F"/>
                 </a:solidFill>
                 <a:latin typeface="Amiri" pitchFamily="2" charset="-78"/>
+                <a:ea typeface="Amiri" pitchFamily="2" charset="-78"/>
                 <a:cs typeface="Amiri" pitchFamily="2" charset="-78"/>
               </a:rPr>
               <a:t>الإِبْدَاعُ</a:t>
@@ -35200,6 +35430,7 @@
                   <a:srgbClr val="1B3B6F"/>
                 </a:solidFill>
                 <a:latin typeface="Amiri" pitchFamily="2" charset="-78"/>
+                <a:ea typeface="Amiri" pitchFamily="2" charset="-78"/>
                 <a:cs typeface="Amiri" pitchFamily="2" charset="-78"/>
               </a:rPr>
               <a:t>مُبْدِعَةٌ</a:t>
@@ -35465,6 +35696,7 @@
                   <a:srgbClr val="1B3B6F"/>
                 </a:solidFill>
                 <a:latin typeface="Amiri" pitchFamily="2" charset="-78"/>
+                <a:ea typeface="Amiri" pitchFamily="2" charset="-78"/>
                 <a:cs typeface="Amiri" pitchFamily="2" charset="-78"/>
               </a:rPr>
               <a:t>اجْتِمَاعِيٌّ</a:t>
@@ -35622,6 +35854,7 @@
                   <a:srgbClr val="1B3B6F"/>
                 </a:solidFill>
                 <a:latin typeface="Amiri" pitchFamily="2" charset="-78"/>
+                <a:ea typeface="Amiri" pitchFamily="2" charset="-78"/>
                 <a:cs typeface="Amiri" pitchFamily="2" charset="-78"/>
               </a:rPr>
               <a:t>خَجُولٌ · خَجُولَةٌ</a:t>
@@ -35725,6 +35958,7 @@
                   <a:srgbClr val="1B3B6F"/>
                 </a:solidFill>
                 <a:latin typeface="Amiri" pitchFamily="2" charset="-78"/>
+                <a:ea typeface="Amiri" pitchFamily="2" charset="-78"/>
                 <a:cs typeface="Amiri" pitchFamily="2" charset="-78"/>
               </a:rPr>
               <a:t>اجْتِمَاعِيَّةٌ</a:t>
@@ -35990,6 +36224,7 @@
                   <a:srgbClr val="1B3B6F"/>
                 </a:solidFill>
                 <a:latin typeface="Amiri" pitchFamily="2" charset="-78"/>
+                <a:ea typeface="Amiri" pitchFamily="2" charset="-78"/>
                 <a:cs typeface="Amiri" pitchFamily="2" charset="-78"/>
               </a:rPr>
               <a:t>دَقِيقٌ</a:t>
@@ -36147,6 +36382,7 @@
                   <a:srgbClr val="1B3B6F"/>
                 </a:solidFill>
                 <a:latin typeface="Amiri" pitchFamily="2" charset="-78"/>
+                <a:ea typeface="Amiri" pitchFamily="2" charset="-78"/>
                 <a:cs typeface="Amiri" pitchFamily="2" charset="-78"/>
               </a:rPr>
               <a:t>الدِّقَّةُ</a:t>
@@ -36250,6 +36486,7 @@
                   <a:srgbClr val="1B3B6F"/>
                 </a:solidFill>
                 <a:latin typeface="Amiri" pitchFamily="2" charset="-78"/>
+                <a:ea typeface="Amiri" pitchFamily="2" charset="-78"/>
                 <a:cs typeface="Amiri" pitchFamily="2" charset="-78"/>
               </a:rPr>
               <a:t>دَقِيقَةٌ</a:t>
@@ -36383,6 +36620,7 @@
                   <a:srgbClr val="D4AF37"/>
                 </a:solidFill>
                 <a:latin typeface="Amiri" pitchFamily="2" charset="-78"/>
+                <a:ea typeface="Amiri" pitchFamily="2" charset="-78"/>
                 <a:cs typeface="Amiri" pitchFamily="2" charset="-78"/>
               </a:rPr>
               <a:t>م</a:t>
@@ -36703,6 +36941,7 @@
                   <a:srgbClr val="8A6D1E"/>
                 </a:solidFill>
                 <a:latin typeface="Amiri" pitchFamily="2" charset="-78"/>
+                <a:ea typeface="Amiri" pitchFamily="2" charset="-78"/>
                 <a:cs typeface="Amiri" pitchFamily="2" charset="-78"/>
               </a:rPr>
               <a:t>المِهْنَةُ الَّتِي تَحْتَاجُ إِلَى …</a:t>
@@ -37006,6 +37245,7 @@
                   <a:srgbClr val="1B3B6F"/>
                 </a:solidFill>
                 <a:latin typeface="Amiri" pitchFamily="2" charset="-78"/>
+                <a:ea typeface="Amiri" pitchFamily="2" charset="-78"/>
                 <a:cs typeface="Amiri" pitchFamily="2" charset="-78"/>
               </a:rPr>
               <a:t>مُتَعَاوِنٌ</a:t>
@@ -37163,6 +37403,7 @@
                   <a:srgbClr val="1B3B6F"/>
                 </a:solidFill>
                 <a:latin typeface="Amiri" pitchFamily="2" charset="-78"/>
+                <a:ea typeface="Amiri" pitchFamily="2" charset="-78"/>
                 <a:cs typeface="Amiri" pitchFamily="2" charset="-78"/>
               </a:rPr>
               <a:t>العَمَلُ الجَمَاعِيُّ</a:t>
@@ -37266,6 +37507,7 @@
                   <a:srgbClr val="1B3B6F"/>
                 </a:solidFill>
                 <a:latin typeface="Amiri" pitchFamily="2" charset="-78"/>
+                <a:ea typeface="Amiri" pitchFamily="2" charset="-78"/>
                 <a:cs typeface="Amiri" pitchFamily="2" charset="-78"/>
               </a:rPr>
               <a:t>مُتَعَاوِنَةٌ</a:t>
@@ -37531,6 +37773,7 @@
                   <a:srgbClr val="1B3B6F"/>
                 </a:solidFill>
                 <a:latin typeface="Amiri" pitchFamily="2" charset="-78"/>
+                <a:ea typeface="Amiri" pitchFamily="2" charset="-78"/>
                 <a:cs typeface="Amiri" pitchFamily="2" charset="-78"/>
               </a:rPr>
               <a:t>وَاثِقٌ مِنْ نَفْسِهِ</a:t>
@@ -37688,6 +37931,7 @@
                   <a:srgbClr val="1B3B6F"/>
                 </a:solidFill>
                 <a:latin typeface="Amiri" pitchFamily="2" charset="-78"/>
+                <a:ea typeface="Amiri" pitchFamily="2" charset="-78"/>
                 <a:cs typeface="Amiri" pitchFamily="2" charset="-78"/>
               </a:rPr>
               <a:t>الثِّقَةُ بِالنَّفْسِ</a:t>
@@ -37791,6 +38035,7 @@
                   <a:srgbClr val="1B3B6F"/>
                 </a:solidFill>
                 <a:latin typeface="Amiri" pitchFamily="2" charset="-78"/>
+                <a:ea typeface="Amiri" pitchFamily="2" charset="-78"/>
                 <a:cs typeface="Amiri" pitchFamily="2" charset="-78"/>
               </a:rPr>
               <a:t>وَاثِقَةٌ مِنْ نَفْسِهَا</a:t>
@@ -38056,6 +38301,7 @@
                   <a:srgbClr val="1B3B6F"/>
                 </a:solidFill>
                 <a:latin typeface="Amiri" pitchFamily="2" charset="-78"/>
+                <a:ea typeface="Amiri" pitchFamily="2" charset="-78"/>
                 <a:cs typeface="Amiri" pitchFamily="2" charset="-78"/>
               </a:rPr>
               <a:t>نُقْطَةُ قُوَّةٍ</a:t>
@@ -38213,6 +38459,7 @@
                   <a:srgbClr val="1B3B6F"/>
                 </a:solidFill>
                 <a:latin typeface="Amiri" pitchFamily="2" charset="-78"/>
+                <a:ea typeface="Amiri" pitchFamily="2" charset="-78"/>
                 <a:cs typeface="Amiri" pitchFamily="2" charset="-78"/>
               </a:rPr>
               <a:t>نُقْطَةُ ضَعْفٍ</a:t>
@@ -38316,6 +38563,7 @@
                   <a:srgbClr val="1B3B6F"/>
                 </a:solidFill>
                 <a:latin typeface="Amiri" pitchFamily="2" charset="-78"/>
+                <a:ea typeface="Amiri" pitchFamily="2" charset="-78"/>
                 <a:cs typeface="Amiri" pitchFamily="2" charset="-78"/>
               </a:rPr>
               <a:t>نِقَاطُ القُوَّةِ</a:t>
@@ -38581,6 +38829,7 @@
                   <a:srgbClr val="1B3B6F"/>
                 </a:solidFill>
                 <a:latin typeface="Amiri" pitchFamily="2" charset="-78"/>
+                <a:ea typeface="Amiri" pitchFamily="2" charset="-78"/>
                 <a:cs typeface="Amiri" pitchFamily="2" charset="-78"/>
               </a:rPr>
               <a:t>يَحْتَاجُ إِلَى …</a:t>
@@ -38738,6 +38987,7 @@
                   <a:srgbClr val="1B3B6F"/>
                 </a:solidFill>
                 <a:latin typeface="Amiri" pitchFamily="2" charset="-78"/>
+                <a:ea typeface="Amiri" pitchFamily="2" charset="-78"/>
                 <a:cs typeface="Amiri" pitchFamily="2" charset="-78"/>
               </a:rPr>
               <a:t>تَحْتَاجُ الوَظِيفَةُ إِلَى</a:t>
@@ -38841,6 +39091,7 @@
                   <a:srgbClr val="1B3B6F"/>
                 </a:solidFill>
                 <a:latin typeface="Amiri" pitchFamily="2" charset="-78"/>
+                <a:ea typeface="Amiri" pitchFamily="2" charset="-78"/>
                 <a:cs typeface="Amiri" pitchFamily="2" charset="-78"/>
               </a:rPr>
               <a:t>تَحْتَاجُ إِلَى</a:t>
@@ -39106,6 +39357,7 @@
                   <a:srgbClr val="1B3B6F"/>
                 </a:solidFill>
                 <a:latin typeface="Amiri" pitchFamily="2" charset="-78"/>
+                <a:ea typeface="Amiri" pitchFamily="2" charset="-78"/>
                 <a:cs typeface="Amiri" pitchFamily="2" charset="-78"/>
               </a:rPr>
               <a:t>الَّذِي · الَّتِي · الَّذِينَ</a:t>
@@ -39155,11 +39407,12 @@
               <a:buNone/>
             </a:pPr>
             <a:r>
-              <a:rPr lang="en-US" sz="1100" i="1" dirty="0">
+              <a:rPr lang="ar-SA" sz="1100" i="1" dirty="0">
                 <a:solidFill>
                   <a:srgbClr val="5A6472"/>
                 </a:solidFill>
                 <a:latin typeface="Calibri" pitchFamily="34" charset="0"/>
+                <a:ea typeface="Amiri" pitchFamily="2" charset="-78"/>
                 <a:cs typeface="Amiri" pitchFamily="2" charset="-78"/>
               </a:rPr>
               <a:t>al-َ-dhī · al-َ-tī · al-َ-dhī-na</a:t>
@@ -39263,6 +39516,7 @@
                   <a:srgbClr val="1B3B6F"/>
                 </a:solidFill>
                 <a:latin typeface="Amiri" pitchFamily="2" charset="-78"/>
+                <a:ea typeface="Amiri" pitchFamily="2" charset="-78"/>
                 <a:cs typeface="Amiri" pitchFamily="2" charset="-78"/>
               </a:rPr>
               <a:t>المُمَرِّضَاتُ اللَّوَاتِي</a:t>
@@ -39366,6 +39620,7 @@
                   <a:srgbClr val="1B3B6F"/>
                 </a:solidFill>
                 <a:latin typeface="Amiri" pitchFamily="2" charset="-78"/>
+                <a:ea typeface="Amiri" pitchFamily="2" charset="-78"/>
                 <a:cs typeface="Amiri" pitchFamily="2" charset="-78"/>
               </a:rPr>
               <a:t>الطَّبِيبُ الَّذِي</a:t>
@@ -39631,6 +39886,7 @@
                   <a:srgbClr val="1B3B6F"/>
                 </a:solidFill>
                 <a:latin typeface="Amiri" pitchFamily="2" charset="-78"/>
+                <a:ea typeface="Amiri" pitchFamily="2" charset="-78"/>
                 <a:cs typeface="Amiri" pitchFamily="2" charset="-78"/>
               </a:rPr>
               <a:t>لِأَنِّي · لِأَنَّهُ · لِأَنَّهَا</a:t>
@@ -39788,6 +40044,7 @@
                   <a:srgbClr val="1B3B6F"/>
                 </a:solidFill>
                 <a:latin typeface="Amiri" pitchFamily="2" charset="-78"/>
+                <a:ea typeface="Amiri" pitchFamily="2" charset="-78"/>
                 <a:cs typeface="Amiri" pitchFamily="2" charset="-78"/>
               </a:rPr>
               <a:t>وَالدَّلِيلُ أَنَّ</a:t>
@@ -39891,6 +40148,7 @@
                   <a:srgbClr val="1B3B6F"/>
                 </a:solidFill>
                 <a:latin typeface="Amiri" pitchFamily="2" charset="-78"/>
+                <a:ea typeface="Amiri" pitchFamily="2" charset="-78"/>
                 <a:cs typeface="Amiri" pitchFamily="2" charset="-78"/>
               </a:rPr>
               <a:t>فَمَثَلًا</a:t>
@@ -40024,6 +40282,7 @@
                   <a:srgbClr val="D4AF37"/>
                 </a:solidFill>
                 <a:latin typeface="Amiri" pitchFamily="2" charset="-78"/>
+                <a:ea typeface="Amiri" pitchFamily="2" charset="-78"/>
                 <a:cs typeface="Amiri" pitchFamily="2" charset="-78"/>
               </a:rPr>
               <a:t>م</a:t>
@@ -40344,6 +40603,7 @@
                   <a:srgbClr val="8A6D1E"/>
                 </a:solidFill>
                 <a:latin typeface="Amiri" pitchFamily="2" charset="-78"/>
+                <a:ea typeface="Amiri" pitchFamily="2" charset="-78"/>
                 <a:cs typeface="Amiri" pitchFamily="2" charset="-78"/>
               </a:rPr>
               <a:t>فِي الغُرَفِ</a:t>
@@ -41520,6 +41780,7 @@
                   <a:srgbClr val="1B3B6F"/>
                 </a:solidFill>
                 <a:latin typeface="Amiri" pitchFamily="2" charset="-78"/>
+                <a:ea typeface="Amiri" pitchFamily="2" charset="-78"/>
                 <a:cs typeface="Amiri" pitchFamily="2" charset="-78"/>
               </a:rPr>
               <a:t>دَوْرُكَ!</a:t>
@@ -41596,6 +41857,7 @@
                   <a:srgbClr val="1B3B6F"/>
                 </a:solidFill>
                 <a:latin typeface="Amiri" pitchFamily="2" charset="-78"/>
+                <a:ea typeface="Amiri" pitchFamily="2" charset="-78"/>
                 <a:cs typeface="Amiri" pitchFamily="2" charset="-78"/>
               </a:rPr>
               <a:t>أَحْسَنْتَ! / أَحْسَنْتِ!</a:t>
@@ -41672,6 +41934,7 @@
                   <a:srgbClr val="1B3B6F"/>
                 </a:solidFill>
                 <a:latin typeface="Amiri" pitchFamily="2" charset="-78"/>
+                <a:ea typeface="Amiri" pitchFamily="2" charset="-78"/>
                 <a:cs typeface="Amiri" pitchFamily="2" charset="-78"/>
               </a:rPr>
               <a:t>تَكَلَّمْ أَكْثَرَ، مِنْ فَضْلِكَ</a:t>
@@ -41748,6 +42011,7 @@
                   <a:srgbClr val="1B3B6F"/>
                 </a:solidFill>
                 <a:latin typeface="Amiri" pitchFamily="2" charset="-78"/>
+                <a:ea typeface="Amiri" pitchFamily="2" charset="-78"/>
                 <a:cs typeface="Amiri" pitchFamily="2" charset="-78"/>
               </a:rPr>
               <a:t>لِمَاذَا؟</a:t>
@@ -41919,6 +42183,7 @@
                   <a:srgbClr val="D4AF37"/>
                 </a:solidFill>
                 <a:latin typeface="Amiri" pitchFamily="2" charset="-78"/>
+                <a:ea typeface="Amiri" pitchFamily="2" charset="-78"/>
                 <a:cs typeface="Amiri" pitchFamily="2" charset="-78"/>
               </a:rPr>
               <a:t>م</a:t>
@@ -42239,6 +42504,7 @@
                   <a:srgbClr val="8A6D1E"/>
                 </a:solidFill>
                 <a:latin typeface="Amiri" pitchFamily="2" charset="-78"/>
+                <a:ea typeface="Amiri" pitchFamily="2" charset="-78"/>
                 <a:cs typeface="Amiri" pitchFamily="2" charset="-78"/>
               </a:rPr>
               <a:t>طَلَبُ أَنْ أَكُونَ مُشْرِفًا</a:t>
@@ -42519,6 +42785,7 @@
                   <a:srgbClr val="1B3B6F"/>
                 </a:solidFill>
                 <a:latin typeface="Amiri" pitchFamily="2" charset="-78"/>
+                <a:ea typeface="Amiri" pitchFamily="2" charset="-78"/>
                 <a:cs typeface="Amiri" pitchFamily="2" charset="-78"/>
               </a:rPr>
               <a:t>لِأَنِّي أُحِبُّ …</a:t>
@@ -42595,6 +42862,7 @@
                   <a:srgbClr val="1B3B6F"/>
                 </a:solidFill>
                 <a:latin typeface="Amiri" pitchFamily="2" charset="-78"/>
+                <a:ea typeface="Amiri" pitchFamily="2" charset="-78"/>
                 <a:cs typeface="Amiri" pitchFamily="2" charset="-78"/>
               </a:rPr>
               <a:t>لِمَاذَا تُرِيدُ أَنْ تَكُونَ مُشْرِفًا؟</a:t>
@@ -42763,6 +43031,7 @@
                   <a:srgbClr val="1B3B6F"/>
                 </a:solidFill>
                 <a:latin typeface="Amiri" pitchFamily="2" charset="-78"/>
+                <a:ea typeface="Amiri" pitchFamily="2" charset="-78"/>
                 <a:cs typeface="Amiri" pitchFamily="2" charset="-78"/>
               </a:rPr>
               <a:t>أَنَا … وَ…</a:t>
@@ -42839,6 +43108,7 @@
                   <a:srgbClr val="1B3B6F"/>
                 </a:solidFill>
                 <a:latin typeface="Amiri" pitchFamily="2" charset="-78"/>
+                <a:ea typeface="Amiri" pitchFamily="2" charset="-78"/>
                 <a:cs typeface="Amiri" pitchFamily="2" charset="-78"/>
               </a:rPr>
               <a:t>صِفْ نَفْسَكَ بِكَلِمَتَيْنِ.</a:t>
@@ -43007,6 +43277,7 @@
                   <a:srgbClr val="1B3B6F"/>
                 </a:solidFill>
                 <a:latin typeface="Amiri" pitchFamily="2" charset="-78"/>
+                <a:ea typeface="Amiri" pitchFamily="2" charset="-78"/>
                 <a:cs typeface="Amiri" pitchFamily="2" charset="-78"/>
               </a:rPr>
               <a:t>أَحْيَانًا أَنَا …</a:t>
@@ -43083,6 +43354,7 @@
                   <a:srgbClr val="1B3B6F"/>
                 </a:solidFill>
                 <a:latin typeface="Amiri" pitchFamily="2" charset="-78"/>
+                <a:ea typeface="Amiri" pitchFamily="2" charset="-78"/>
                 <a:cs typeface="Amiri" pitchFamily="2" charset="-78"/>
               </a:rPr>
               <a:t>وَمَا نُقْطَةُ ضَعْفِكَ؟</a:t>
@@ -43251,6 +43523,7 @@
                   <a:srgbClr val="1B3B6F"/>
                 </a:solidFill>
                 <a:latin typeface="Amiri" pitchFamily="2" charset="-78"/>
+                <a:ea typeface="Amiri" pitchFamily="2" charset="-78"/>
                 <a:cs typeface="Amiri" pitchFamily="2" charset="-78"/>
               </a:rPr>
               <a:t>كَمْ يَوْمًا …؟</a:t>
@@ -43327,6 +43600,7 @@
                   <a:srgbClr val="1B3B6F"/>
                 </a:solidFill>
                 <a:latin typeface="Amiri" pitchFamily="2" charset="-78"/>
+                <a:ea typeface="Amiri" pitchFamily="2" charset="-78"/>
                 <a:cs typeface="Amiri" pitchFamily="2" charset="-78"/>
               </a:rPr>
               <a:t>المُشْرِفُ يَعْمَلُ فِي الاسْتِرَاحَةِ.</a:t>
@@ -43495,6 +43769,7 @@
                   <a:srgbClr val="1B3B6F"/>
                 </a:solidFill>
                 <a:latin typeface="Amiri" pitchFamily="2" charset="-78"/>
+                <a:ea typeface="Amiri" pitchFamily="2" charset="-78"/>
                 <a:cs typeface="Amiri" pitchFamily="2" charset="-78"/>
               </a:rPr>
               <a:t>يَقُولُونَ إِنِّي …</a:t>
@@ -43571,6 +43846,7 @@
                   <a:srgbClr val="1B3B6F"/>
                 </a:solidFill>
                 <a:latin typeface="Amiri" pitchFamily="2" charset="-78"/>
+                <a:ea typeface="Amiri" pitchFamily="2" charset="-78"/>
                 <a:cs typeface="Amiri" pitchFamily="2" charset="-78"/>
               </a:rPr>
               <a:t>مَا رَأْيُ أَصْدِقَائِكَ فِيكَ؟</a:t>
@@ -43845,6 +44121,7 @@
                   <a:srgbClr val="D4AF37"/>
                 </a:solidFill>
                 <a:latin typeface="Amiri" pitchFamily="2" charset="-78"/>
+                <a:ea typeface="Amiri" pitchFamily="2" charset="-78"/>
                 <a:cs typeface="Amiri" pitchFamily="2" charset="-78"/>
               </a:rPr>
               <a:t>م</a:t>
@@ -44165,6 +44442,7 @@
                   <a:srgbClr val="8A6D1E"/>
                 </a:solidFill>
                 <a:latin typeface="Amiri" pitchFamily="2" charset="-78"/>
+                <a:ea typeface="Amiri" pitchFamily="2" charset="-78"/>
                 <a:cs typeface="Amiri" pitchFamily="2" charset="-78"/>
               </a:rPr>
               <a:t>أَيُّ وَظِيفَةٍ تُنَاسِبُنِي؟</a:t>
@@ -44445,6 +44723,7 @@
                   <a:srgbClr val="1B3B6F"/>
                 </a:solidFill>
                 <a:latin typeface="Amiri" pitchFamily="2" charset="-78"/>
+                <a:ea typeface="Amiri" pitchFamily="2" charset="-78"/>
                 <a:cs typeface="Amiri" pitchFamily="2" charset="-78"/>
               </a:rPr>
               <a:t>أَنَا … وَ…</a:t>
@@ -44521,6 +44800,7 @@
                   <a:srgbClr val="1B3B6F"/>
                 </a:solidFill>
                 <a:latin typeface="Amiri" pitchFamily="2" charset="-78"/>
+                <a:ea typeface="Amiri" pitchFamily="2" charset="-78"/>
                 <a:cs typeface="Amiri" pitchFamily="2" charset="-78"/>
               </a:rPr>
               <a:t>مَا نِقَاطُ قُوَّتِكَ؟</a:t>
@@ -44689,6 +44969,7 @@
                   <a:srgbClr val="1B3B6F"/>
                 </a:solidFill>
                 <a:latin typeface="Amiri" pitchFamily="2" charset="-78"/>
+                <a:ea typeface="Amiri" pitchFamily="2" charset="-78"/>
                 <a:cs typeface="Amiri" pitchFamily="2" charset="-78"/>
               </a:rPr>
               <a:t>فَمَثَلًا …</a:t>
@@ -44765,6 +45046,7 @@
                   <a:srgbClr val="1B3B6F"/>
                 </a:solidFill>
                 <a:latin typeface="Amiri" pitchFamily="2" charset="-78"/>
+                <a:ea typeface="Amiri" pitchFamily="2" charset="-78"/>
                 <a:cs typeface="Amiri" pitchFamily="2" charset="-78"/>
               </a:rPr>
               <a:t>أَعْطِنِي مِثَالًا.</a:t>
@@ -44933,6 +45215,7 @@
                   <a:srgbClr val="1B3B6F"/>
                 </a:solidFill>
                 <a:latin typeface="Amiri" pitchFamily="2" charset="-78"/>
+                <a:ea typeface="Amiri" pitchFamily="2" charset="-78"/>
                 <a:cs typeface="Amiri" pitchFamily="2" charset="-78"/>
               </a:rPr>
               <a:t>مَا الصِّفَاتُ الَّتِي …؟</a:t>
@@ -45009,6 +45292,7 @@
                   <a:srgbClr val="1B3B6F"/>
                 </a:solidFill>
                 <a:latin typeface="Amiri" pitchFamily="2" charset="-78"/>
+                <a:ea typeface="Amiri" pitchFamily="2" charset="-78"/>
                 <a:cs typeface="Amiri" pitchFamily="2" charset="-78"/>
               </a:rPr>
               <a:t>رُبَّمَا تُنَاسِبُكَ مِهْنَةُ المُعَلِّمِ.</a:t>
@@ -45112,6 +45396,7 @@
                   <a:srgbClr val="1B3B6F"/>
                 </a:solidFill>
                 <a:latin typeface="Amiri" pitchFamily="2" charset="-78"/>
+                <a:ea typeface="Amiri" pitchFamily="2" charset="-78"/>
                 <a:cs typeface="Amiri" pitchFamily="2" charset="-78"/>
               </a:rPr>
               <a:t>عِنْدِي … لٰكِنِّي أَحْتَاجُ إِلَى …</a:t>
@@ -45188,6 +45473,7 @@
                   <a:srgbClr val="1B3B6F"/>
                 </a:solidFill>
                 <a:latin typeface="Amiri" pitchFamily="2" charset="-78"/>
+                <a:ea typeface="Amiri" pitchFamily="2" charset="-78"/>
                 <a:cs typeface="Amiri" pitchFamily="2" charset="-78"/>
               </a:rPr>
               <a:t>الصَّبْرُ وَالتَّنْظِيمُ وَالثِّقَةُ.</a:t>
@@ -45291,6 +45577,7 @@
                   <a:srgbClr val="1B3B6F"/>
                 </a:solidFill>
                 <a:latin typeface="Amiri" pitchFamily="2" charset="-78"/>
+                <a:ea typeface="Amiri" pitchFamily="2" charset="-78"/>
                 <a:cs typeface="Amiri" pitchFamily="2" charset="-78"/>
               </a:rPr>
               <a:t>تُنَاسِبُنِي أَكْثَرَ لِأَنَّ …</a:t>
@@ -45367,6 +45654,7 @@
                   <a:srgbClr val="1B3B6F"/>
                 </a:solidFill>
                 <a:latin typeface="Amiri" pitchFamily="2" charset="-78"/>
+                <a:ea typeface="Amiri" pitchFamily="2" charset="-78"/>
                 <a:cs typeface="Amiri" pitchFamily="2" charset="-78"/>
               </a:rPr>
               <a:t>وَمَاذَا عَنْ مِهْنَةِ المُصَمِّمِ؟</a:t>
@@ -45541,13 +45829,9 @@
     <a:fontScheme name="Office">
       <a:majorFont>
         <a:latin typeface="Calibri Light" panose="020F0302020204030204"/>
-        <a:ea typeface=""/>
-        <a:cs typeface=""/>
-        <a:font script="Jpan" typeface="游ゴシック Light"/>
-        <a:font script="Hang" typeface="맑은 고딕"/>
-        <a:font script="Hans" typeface="等线 Light"/>
-        <a:font script="Hant" typeface="新細明體"/>
-        <a:font script="Arab" typeface="Times New Roman"/>
+        <a:ea typeface="Amiri" pitchFamily="2" charset="-78"/>
+        <a:cs typeface="Amiri" pitchFamily="2" charset="-78"/>
+        <a:font script="Arab" typeface="Amiri"/>
         <a:font script="Hebr" typeface="Times New Roman"/>
         <a:font script="Thai" typeface="Angsana New"/>
         <a:font script="Ethi" typeface="Nyala"/>
@@ -45593,13 +45877,9 @@
       </a:majorFont>
       <a:minorFont>
         <a:latin typeface="Calibri" panose="020F0502020204030204"/>
-        <a:ea typeface=""/>
-        <a:cs typeface=""/>
-        <a:font script="Jpan" typeface="游ゴシック"/>
-        <a:font script="Hang" typeface="맑은 고딕"/>
-        <a:font script="Hans" typeface="等线"/>
-        <a:font script="Hant" typeface="新細明體"/>
-        <a:font script="Arab" typeface="Arial"/>
+        <a:ea typeface="Amiri" pitchFamily="2" charset="-78"/>
+        <a:cs typeface="Amiri" pitchFamily="2" charset="-78"/>
+        <a:font script="Arab" typeface="Amiri"/>
         <a:font script="Hebr" typeface="Arial"/>
         <a:font script="Thai" typeface="Cordia New"/>
         <a:font script="Ethi" typeface="Nyala"/>
